--- a/L01_overview/L01.pptx
+++ b/L01_overview/L01.pptx
@@ -22,6 +22,8 @@
     <p:sldId id="270" r:id="rId22"/>
     <p:sldId id="271" r:id="rId23"/>
     <p:sldId id="272" r:id="rId24"/>
+    <p:sldId id="273" r:id="rId25"/>
+    <p:sldId id="274" r:id="rId26"/>
   </p:sldIdLst>
   <p:sldSz cx="12191695" cy="6858000" type="screen4x3"/>
   <p:notesSz cx="6858000" cy="9144000"/>
@@ -518,17 +520,27 @@
           <a:lstStyle/>
           <a:p>
             <a:r>
-              <a:t>0:00 AGHAZ (3 min). Names into workbooks first - 30 real seconds, do not talk over it.</a:t>
-            </a:r>
-          </a:p>
-          <a:p>
-            <a:r>
-              <a:t>THEN THE NARRATOR PARAGRAPH - do not skip, do not rush. 'I am not a historian, I read a book.'</a:t>
-            </a:r>
-          </a:p>
-          <a:p>
-            <a:r>
-              <a:t>This is your shield for ten weeks.</a:t>
+              <a:t>0:00 AGHAZ (3 min). Workbooks and pens are already on the chairs.</a:t>
+            </a:r>
+          </a:p>
+          <a:p>
+            <a:r>
+              <a:t>FIRST INSTRUCTION OF THE COURSE: 'apna naam likh lijiye.' Give a real 30 seconds.</a:t>
+            </a:r>
+          </a:p>
+          <a:p>
+            <a:r>
+              <a:t>THEN THE NARRATOR PARAGRAPH - do not skip, do not rush:</a:t>
+            </a:r>
+          </a:p>
+          <a:p>
+            <a:r>
+              <a:t>  'main mu'arrikh nahin hoon. hum ek kitab parh rahe hain - Tareekh-e-Ummat.'</a:t>
+            </a:r>
+          </a:p>
+          <a:p>
+            <a:r>
+              <a:t>This is your shield for all ten weeks.</a:t>
             </a:r>
           </a:p>
         </p:txBody>
@@ -598,17 +610,17 @@
           <a:lstStyle/>
           <a:p>
             <a:r>
-              <a:t>0:28 TAARUF (7 min). SAY FIRST: all three get their own session; tonight is introduction only.</a:t>
-            </a:r>
-          </a:p>
-          <a:p>
-            <a:r>
-              <a:t>READ EACH FROM THE PRINTED CARD - never from memory.</a:t>
-            </a:r>
-          </a:p>
-          <a:p>
-            <a:r>
-              <a:t>WARNING: Hulagu's waqi'a must NOT be the fall of Baghdad - that was tonight's opening scene.</a:t>
+              <a:t>Move 6. SOBER. No present-day politics - the venue has ruled it out.</a:t>
+            </a:r>
+          </a:p>
+          <a:p>
+            <a:r>
+              <a:t>PEN-DOWN 4, the last mark.</a:t>
+            </a:r>
+          </a:p>
+          <a:p>
+            <a:r>
+              <a:t>If asked about 1924 -&gt; SEVENTH session. About 1947 -&gt; NINTH. Do not mix them up.</a:t>
             </a:r>
           </a:p>
         </p:txBody>
@@ -678,17 +690,17 @@
           <a:lstStyle/>
           <a:p>
             <a:r>
-              <a:t>Four lines, read from the card: naam o nasab / sunain / one sentence / EK WAQI'A.</a:t>
-            </a:r>
-          </a:p>
-          <a:p>
-            <a:r>
-              <a:t>[SOURCE: all four lines. The laqab field stays EMPTY until read off the page.]</a:t>
-            </a:r>
-          </a:p>
-          <a:p>
-            <a:r>
-              <a:t>Workbook prints the first three and leaves 'ek waqi'a' blank for them to write.</a:t>
+              <a:t>0:28 TAARUF (7 min). SAY FIRST: all three get their own session; tonight is an</a:t>
+            </a:r>
+          </a:p>
+          <a:p>
+            <a:r>
+              <a:t>introduction only. READ EACH FROM THE PRINTED CARD - never from memory.</a:t>
+            </a:r>
+          </a:p>
+          <a:p>
+            <a:r>
+              <a:t>Workbook prints the first lines and leaves ONE INCIDENT blank for them to write.</a:t>
             </a:r>
           </a:p>
         </p:txBody>
@@ -758,17 +770,7 @@
           <a:lstStyle/>
           <a:p>
             <a:r>
-              <a:t>Four lines, read from the card: naam o nasab / sunain / one sentence / EK WAQI'A.</a:t>
-            </a:r>
-          </a:p>
-          <a:p>
-            <a:r>
-              <a:t>[SOURCE: all four lines. The laqab field stays EMPTY until read off the page.]</a:t>
-            </a:r>
-          </a:p>
-          <a:p>
-            <a:r>
-              <a:t>Workbook prints the first three and leaves 'ek waqi'a' blank for them to write.</a:t>
+              <a:t>Meets them properly next week. Do not spend his material tonight.</a:t>
             </a:r>
           </a:p>
         </p:txBody>
@@ -838,17 +840,12 @@
           <a:lstStyle/>
           <a:p>
             <a:r>
-              <a:t>Four lines, read from the card: naam o nasab / sunain / one sentence / EK WAQI'A.</a:t>
-            </a:r>
-          </a:p>
-          <a:p>
-            <a:r>
-              <a:t>[SOURCE: all four lines. The laqab field stays EMPTY until read off the page.]</a:t>
-            </a:r>
-          </a:p>
-          <a:p>
-            <a:r>
-              <a:t>Workbook prints the first three and leaves 'ek waqi'a' blank for them to write.</a:t>
+              <a:t>WARNING: his incident must NOT be the fall of Baghdad - that was tonight's opening scene</a:t>
+            </a:r>
+          </a:p>
+          <a:p>
+            <a:r>
+              <a:t>and the segment would simply repeat itself. Pick something else.</a:t>
             </a:r>
           </a:p>
         </p:txBody>
@@ -918,22 +915,12 @@
           <a:lstStyle/>
           <a:p>
             <a:r>
-              <a:t>0:35 (3 min). FIRST the demonstration, THEN the slide.</a:t>
-            </a:r>
-          </a:p>
-          <a:p>
-            <a:r>
-              <a:t>'Suppose someone says Muhammad al-Fatih wrote a letter to Hulagu.' Point at THEIR OWN sheet.</a:t>
-            </a:r>
-          </a:p>
-          <a:p>
-            <a:r>
-              <a:t>Two centuries apart. Done. No Arabic needed, no isnad needed - the timeline alone killed it.</a:t>
-            </a:r>
-          </a:p>
-          <a:p>
-            <a:r>
-              <a:t>THEN put this up, read once, STOP. Teach no further method tonight.</a:t>
+              <a:t>BLOCKED for sourcing. If you have nothing verified by the night, introduce only the</a:t>
+            </a:r>
+          </a:p>
+          <a:p>
+            <a:r>
+              <a:t>two you do have and say the third comes in session 7.</a:t>
             </a:r>
           </a:p>
         </p:txBody>
@@ -1003,32 +990,27 @@
           <a:lstStyle/>
           <a:p>
             <a:r>
-              <a:t>0:38 (4 min). The slide is headed by the ATTRIBUTION, not the claim. It is not your view.</a:t>
-            </a:r>
-          </a:p>
-          <a:p>
-            <a:r>
-              <a:t>[SOURCE: exact wording of the four + the reference the book gives - read by eye]</a:t>
-            </a:r>
-          </a:p>
-          <a:p>
-            <a:r>
-              <a:t>Read the four. ONE sentence of connection: 'pehli cheez maazi se irtibaat hai, baaqi teenon</a:t>
-            </a:r>
-          </a:p>
-          <a:p>
-            <a:r>
-              <a:t>isi par khari hain.' THEN STOP.</a:t>
-            </a:r>
-          </a:p>
-          <a:p>
-            <a:r>
-              <a:t>90 SECONDS OF SILENCE while they write. Two volunteers max. Say 'shukriya' and NOTHING else -</a:t>
-            </a:r>
-          </a:p>
-          <a:p>
-            <a:r>
-              <a:t>do not improve or build on what they said.</a:t>
+              <a:t>0:33 (4 min). THE ONLY METHODOLOGY IN THE WHOLE COURSE - keep it to four minutes.</a:t>
+            </a:r>
+          </a:p>
+          <a:p>
+            <a:r>
+              <a:t>Do not teach isnad as a technical subject. The point is only: there are two different</a:t>
+            </a:r>
+          </a:p>
+          <a:p>
+            <a:r>
+              <a:t>ways of deciding what is true about the past, and ours has a mechanism the other lacks.</a:t>
+            </a:r>
+          </a:p>
+          <a:p>
+            <a:r>
+              <a:t>Be fair, not mocking - they work hard, they simply have no isnad system.</a:t>
+            </a:r>
+          </a:p>
+          <a:p>
+            <a:r>
+              <a:t>Then go straight to the Sufyan quotation and stop.</a:t>
             </a:r>
           </a:p>
         </p:txBody>
@@ -1098,22 +1080,22 @@
           <a:lstStyle/>
           <a:p>
             <a:r>
-              <a:t>0:42 (3 min). Hold up the workbook: 'yehi ek cheez agle hafte saath laani hai.'</a:t>
-            </a:r>
-          </a:p>
-          <a:p>
-            <a:r>
-              <a:t>Draw a bracket on the banner around 11-23 AH so they SEE how narrow next week is.</a:t>
-            </a:r>
-          </a:p>
-          <a:p>
-            <a:r>
-              <a:t>Say the take-home question ONCE, slowly, write it on the banner, and LEAVE IT UNANSWERED.</a:t>
-            </a:r>
-          </a:p>
-          <a:p>
-            <a:r>
-              <a:t>(want: 'kab? aur kis ne kaha?')</a:t>
+              <a:t>0:37 (2 min). DEMONSTRATE FIRST, then show this.</a:t>
+            </a:r>
+          </a:p>
+          <a:p>
+            <a:r>
+              <a:t>'Suppose someone tells you Mehmed the Conqueror wrote to Hulagu Khan.'</a:t>
+            </a:r>
+          </a:p>
+          <a:p>
+            <a:r>
+              <a:t>Point at THEIR OWN sheet - two centuries apart. Dead. No Arabic needed, no isnad</a:t>
+            </a:r>
+          </a:p>
+          <a:p>
+            <a:r>
+              <a:t>needed; the timeline alone killed it. THEN put this up, read once, and STOP.</a:t>
             </a:r>
           </a:p>
         </p:txBody>
@@ -1183,6 +1165,191 @@
           <a:lstStyle/>
           <a:p>
             <a:r>
+              <a:t>0:39 (4 min). The slide is headed by the ATTRIBUTION, not the claim. It is not your view.</a:t>
+            </a:r>
+          </a:p>
+          <a:p>
+            <a:r>
+              <a:t>[SOURCE: exact wording of the four and the reference the book gives - read by eye]</a:t>
+            </a:r>
+          </a:p>
+          <a:p>
+            <a:r>
+              <a:t>Read them. ONE sentence: the FIRST is connection to the past, and the other three rest</a:t>
+            </a:r>
+          </a:p>
+          <a:p>
+            <a:r>
+              <a:t>on it - which is why tonight began with the whole line instead of the first year.</a:t>
+            </a:r>
+          </a:p>
+          <a:p>
+            <a:r>
+              <a:t>THEN STOP. 90 SECONDS OF SILENCE while they write their own line.</a:t>
+            </a:r>
+          </a:p>
+          <a:p>
+            <a:r>
+              <a:t>Two volunteers max. Say 'shukriya' and NOTHING else - do not improve on what they said.</a:t>
+            </a:r>
+          </a:p>
+        </p:txBody>
+      </p:sp>
+      <p:sp>
+        <p:nvSpPr>
+          <p:cNvPr id="4" name="Slide Number Placeholder 3"/>
+          <p:cNvSpPr>
+            <a:spLocks noGrp="1"/>
+          </p:cNvSpPr>
+          <p:nvPr>
+            <p:ph type="sldNum" idx="5" sz="quarter"/>
+          </p:nvPr>
+        </p:nvSpPr>
+        <p:spPr/>
+      </p:sp>
+    </p:spTree>
+  </p:cSld>
+  <p:clrMapOvr>
+    <a:masterClrMapping/>
+  </p:clrMapOvr>
+</p:notes>
+</file>
+
+<file path=ppt/notesSlides/notesSlide18.xml><?xml version="1.0" encoding="utf-8"?>
+<p:notes xmlns:a="http://schemas.openxmlformats.org/drawingml/2006/main" xmlns:p="http://schemas.openxmlformats.org/presentationml/2006/main" xmlns:r="http://schemas.openxmlformats.org/officeDocument/2006/relationships">
+  <p:cSld>
+    <p:spTree>
+      <p:nvGrpSpPr>
+        <p:cNvPr id="1" name=""/>
+        <p:cNvGrpSpPr/>
+        <p:nvPr/>
+      </p:nvGrpSpPr>
+      <p:grpSpPr>
+        <a:xfrm>
+          <a:off x="0" y="0"/>
+          <a:ext cx="0" cy="0"/>
+          <a:chOff x="0" y="0"/>
+          <a:chExt cx="0" cy="0"/>
+        </a:xfrm>
+      </p:grpSpPr>
+      <p:sp>
+        <p:nvSpPr>
+          <p:cNvPr id="2" name="Slide Image Placeholder 1"/>
+          <p:cNvSpPr>
+            <a:spLocks noGrp="1"/>
+          </p:cNvSpPr>
+          <p:nvPr>
+            <p:ph type="sldImg" idx="2"/>
+          </p:nvPr>
+        </p:nvSpPr>
+        <p:spPr/>
+      </p:sp>
+      <p:sp>
+        <p:nvSpPr>
+          <p:cNvPr id="3" name="Notes Placeholder 2"/>
+          <p:cNvSpPr>
+            <a:spLocks noGrp="1"/>
+          </p:cNvSpPr>
+          <p:nvPr>
+            <p:ph type="body" idx="3" sz="quarter"/>
+          </p:nvPr>
+        </p:nvSpPr>
+        <p:spPr/>
+        <p:txBody>
+          <a:bodyPr/>
+          <a:lstStyle/>
+          <a:p>
+            <a:r>
+              <a:t>0:43 (3 min). Hold up the workbook: the only thing to bring back.</a:t>
+            </a:r>
+          </a:p>
+          <a:p>
+            <a:r>
+              <a:t>Draw a bracket on the BANNER around 11-23 AH so they SEE how narrow next week is.</a:t>
+            </a:r>
+          </a:p>
+          <a:p>
+            <a:r>
+              <a:t>TAKE-HOME, say once and leave unanswered:</a:t>
+            </a:r>
+          </a:p>
+          <a:p>
+            <a:r>
+              <a:t>  'koi tareekh ki baat kahe - to ab aap sab se pehle kya poochhenge?'</a:t>
+            </a:r>
+          </a:p>
+          <a:p>
+            <a:r>
+              <a:t>  (want: when? and who said it?)</a:t>
+            </a:r>
+          </a:p>
+        </p:txBody>
+      </p:sp>
+      <p:sp>
+        <p:nvSpPr>
+          <p:cNvPr id="4" name="Slide Number Placeholder 3"/>
+          <p:cNvSpPr>
+            <a:spLocks noGrp="1"/>
+          </p:cNvSpPr>
+          <p:nvPr>
+            <p:ph type="sldNum" idx="5" sz="quarter"/>
+          </p:nvPr>
+        </p:nvSpPr>
+        <p:spPr/>
+      </p:sp>
+    </p:spTree>
+  </p:cSld>
+  <p:clrMapOvr>
+    <a:masterClrMapping/>
+  </p:clrMapOvr>
+</p:notes>
+</file>
+
+<file path=ppt/notesSlides/notesSlide19.xml><?xml version="1.0" encoding="utf-8"?>
+<p:notes xmlns:a="http://schemas.openxmlformats.org/drawingml/2006/main" xmlns:p="http://schemas.openxmlformats.org/presentationml/2006/main" xmlns:r="http://schemas.openxmlformats.org/officeDocument/2006/relationships">
+  <p:cSld>
+    <p:spTree>
+      <p:nvGrpSpPr>
+        <p:cNvPr id="1" name=""/>
+        <p:cNvGrpSpPr/>
+        <p:nvPr/>
+      </p:nvGrpSpPr>
+      <p:grpSpPr>
+        <a:xfrm>
+          <a:off x="0" y="0"/>
+          <a:ext cx="0" cy="0"/>
+          <a:chOff x="0" y="0"/>
+          <a:chExt cx="0" cy="0"/>
+        </a:xfrm>
+      </p:grpSpPr>
+      <p:sp>
+        <p:nvSpPr>
+          <p:cNvPr id="2" name="Slide Image Placeholder 1"/>
+          <p:cNvSpPr>
+            <a:spLocks noGrp="1"/>
+          </p:cNvSpPr>
+          <p:nvPr>
+            <p:ph type="sldImg" idx="2"/>
+          </p:nvPr>
+        </p:nvSpPr>
+        <p:spPr/>
+      </p:sp>
+      <p:sp>
+        <p:nvSpPr>
+          <p:cNvPr id="3" name="Notes Placeholder 2"/>
+          <p:cNvSpPr>
+            <a:spLocks noGrp="1"/>
+          </p:cNvSpPr>
+          <p:nvPr>
+            <p:ph type="body" idx="3" sz="quarter"/>
+          </p:nvPr>
+        </p:nvSpPr>
+        <p:spPr/>
+        <p:txBody>
+          <a:bodyPr/>
+          <a:lstStyle/>
+          <a:p>
+            <a:r>
               <a:t>Keep for credibility. Show only if someone asks where something came from.</a:t>
             </a:r>
           </a:p>
@@ -1253,27 +1420,27 @@
           <a:lstStyle/>
           <a:p>
             <a:r>
-              <a:t>0:03 OPENING SCENE (5 min). STAND STILL. No map, no movement. Tell Baghdad plainly.</a:t>
-            </a:r>
-          </a:p>
-          <a:p>
-            <a:r>
-              <a:t>[SOURCE: the Mongol volume - the taking of Baghdad in 656, the caliph's name, and what the</a:t>
-            </a:r>
-          </a:p>
-          <a:p>
-            <a:r>
-              <a:t>chroniclers record of the libraries. Say nothing the book does not say.]</a:t>
-            </a:r>
-          </a:p>
-          <a:p>
-            <a:r>
-              <a:t>END: walk to the banner, mark ONE filled square at 656. 'aap bhi yehi nishaan laga lijiye'.</a:t>
-            </a:r>
-          </a:p>
-          <a:p>
-            <a:r>
-              <a:t>PEN-DOWN 1. Then the two questions - DO NOT ANSWER THEM.</a:t>
+              <a:t>0:03 OPENING SCENE (5 min). STAND STILL. No map yet. Tell it plainly, do not raise</a:t>
+            </a:r>
+          </a:p>
+          <a:p>
+            <a:r>
+              <a:t>your voice. [SOURCE: the Mongol volume - the taking of Baghdad, the caliph, and what</a:t>
+            </a:r>
+          </a:p>
+          <a:p>
+            <a:r>
+              <a:t>the chroniclers record of the libraries. Say nothing the book does not say.]</a:t>
+            </a:r>
+          </a:p>
+          <a:p>
+            <a:r>
+              <a:t>END: walk to the BANNER and mark one filled square at 656. Room copies it. PEN-DOWN 1.</a:t>
+            </a:r>
+          </a:p>
+          <a:p>
+            <a:r>
+              <a:t>Then the two questions - AND DO NOT ANSWER THEM.</a:t>
             </a:r>
           </a:p>
         </p:txBody>
@@ -1343,7 +1510,12 @@
           <a:lstStyle/>
           <a:p>
             <a:r>
-              <a:t>Point at the banner, not the screen. The screen is scaffolding; the banner is the object.</a:t>
+              <a:t>Point at the BANNER, not the screen. They have just marked 656 themselves and can see</a:t>
+            </a:r>
+          </a:p>
+          <a:p>
+            <a:r>
+              <a:t>blank line on both sides. Let them sit with it.</a:t>
             </a:r>
           </a:p>
         </p:txBody>
@@ -1413,7 +1585,22 @@
           <a:lstStyle/>
           <a:p>
             <a:r>
-              <a:t>Move 1. One city. Nobody expects what follows.</a:t>
+              <a:t>0:08 THE STORY (20 min) begins here. Six moves, ~3 min each.</a:t>
+            </a:r>
+          </a:p>
+          <a:p>
+            <a:r>
+              <a:t>Introduce the six anchor cities FIRST - they are the furniture for all ten weeks.</a:t>
+            </a:r>
+          </a:p>
+          <a:p>
+            <a:r>
+              <a:t>Then walk the arrows: out of Arabia, west to Cordoba, east to Sindh, north to</a:t>
+            </a:r>
+          </a:p>
+          <a:p>
+            <a:r>
+              <a:t>Constantinople.</a:t>
             </a:r>
           </a:p>
         </p:txBody>
@@ -1483,12 +1670,12 @@
           <a:lstStyle/>
           <a:p>
             <a:r>
-              <a:t>Move 2. THE striking fact of the course. Say it slowly. Draw BOTH arrows.</a:t>
-            </a:r>
-          </a:p>
-          <a:p>
-            <a:r>
-              <a:t>PEN-DOWN 2: 'do teer kheenchiye - ek maghrib, ek mashriq'. [verify 92-93 AH]</a:t>
+              <a:t>Move 1. The Prophet (peace be upon him) has died. At this moment nobody would have</a:t>
+            </a:r>
+          </a:p>
+          <a:p>
+            <a:r>
+              <a:t>predicted anything that follows.</a:t>
             </a:r>
           </a:p>
         </p:txBody>
@@ -1558,7 +1745,12 @@
           <a:lstStyle/>
           <a:p>
             <a:r>
-              <a:t>Move 3. Two capitals at once. [trim to one sentence first if running long]</a:t>
+              <a:t>Move 2. THE STRIKING FACT. Say it slowly - nobody expects it.</a:t>
+            </a:r>
+          </a:p>
+          <a:p>
+            <a:r>
+              <a:t>PEN-DOWN 2: 'do teer kheenchiye - ek maghrib, ek mashriq.' [verify 92-93 AH]</a:t>
             </a:r>
           </a:p>
         </p:txBody>
@@ -1628,17 +1820,7 @@
           <a:lstStyle/>
           <a:p>
             <a:r>
-              <a:t>Move 4. Now the opening mark gets its meaning. The civilisation survived because the</a:t>
-            </a:r>
-          </a:p>
-          <a:p>
-            <a:r>
-              <a:t>books and the scholars had already moved. PEN-DOWN 3.</a:t>
-            </a:r>
-          </a:p>
-          <a:p>
-            <a:r>
-              <a:t>[SOURCE: what actually survived 656 and where it went]</a:t>
+              <a:t>Move 3. [trim to one sentence first if running long.]</a:t>
             </a:r>
           </a:p>
         </p:txBody>
@@ -1708,7 +1890,17 @@
           <a:lstStyle/>
           <a:p>
             <a:r>
-              <a:t>Move 5. The recovery. [verify 857]</a:t>
+              <a:t>Move 4. Now the opening mark gets its meaning. THE KEY IDEA OF THE WHOLE EVENING:</a:t>
+            </a:r>
+          </a:p>
+          <a:p>
+            <a:r>
+              <a:t>a civilisation survived losing its capital because it had moved what mattered.</a:t>
+            </a:r>
+          </a:p>
+          <a:p>
+            <a:r>
+              <a:t>PEN-DOWN 3. [SOURCE: what actually survived 656 and where it went.]</a:t>
             </a:r>
           </a:p>
         </p:txBody>
@@ -1778,12 +1970,7 @@
           <a:lstStyle/>
           <a:p>
             <a:r>
-              <a:t>Move 6. Sober, no politics. PEN-DOWN 4 - the last mark.</a:t>
-            </a:r>
-          </a:p>
-          <a:p>
-            <a:r>
-              <a:t>If asked about 1924 -&gt; SEVENTH session. About 1947 -&gt; NINTH. Do not mix them up.</a:t>
+              <a:t>Move 5. The recovery. [verify 1453]</a:t>
             </a:r>
           </a:p>
         </p:txBody>
@@ -4841,48 +5028,8 @@
         </p:nvSpPr>
         <p:spPr>
           <a:xfrm>
-            <a:off x="822960" y="1737360"/>
-            <a:ext cx="10515600" cy="1463040"/>
-          </a:xfrm>
-          <a:prstGeom prst="rect">
-            <a:avLst/>
-          </a:prstGeom>
-          <a:noFill/>
-        </p:spPr>
-        <p:txBody>
-          <a:bodyPr wrap="square">
-            <a:spAutoFit/>
-          </a:bodyPr>
-          <a:lstStyle/>
-          <a:p>
-            <a:pPr algn="r" rtl="1">
-              <a:lnSpc>
-                <a:spcPct val="160000"/>
-              </a:lnSpc>
-            </a:pPr>
-            <a:r>
-              <a:rPr sz="6000" b="0">
-                <a:solidFill>
-                  <a:srgbClr val="FAF7F0"/>
-                </a:solidFill>
-                <a:latin typeface="Georgia"/>
-                <a:cs typeface="Jameel Noori Nastaleeq"/>
-              </a:rPr>
-              <a:t>تاریخ سے سبق</a:t>
-            </a:r>
-          </a:p>
-        </p:txBody>
-      </p:sp>
-      <p:sp>
-        <p:nvSpPr>
-          <p:cNvPr id="4" name="TextBox 3"/>
-          <p:cNvSpPr txBox="1"/>
-          <p:nvPr/>
-        </p:nvSpPr>
-        <p:spPr>
-          <a:xfrm>
-            <a:off x="822960" y="3200400"/>
-            <a:ext cx="10515600" cy="548640"/>
+            <a:off x="822960" y="1600200"/>
+            <a:ext cx="10515600" cy="1371600"/>
           </a:xfrm>
           <a:prstGeom prst="rect">
             <a:avLst/>
@@ -4901,14 +5048,53 @@
               </a:lnSpc>
             </a:pPr>
             <a:r>
-              <a:rPr sz="2200" b="0">
+              <a:rPr sz="6200" b="0" i="0">
+                <a:solidFill>
+                  <a:srgbClr val="FAF7F0"/>
+                </a:solidFill>
+                <a:latin typeface="Georgia"/>
+              </a:rPr>
+              <a:t>Lessons from History</a:t>
+            </a:r>
+          </a:p>
+        </p:txBody>
+      </p:sp>
+      <p:sp>
+        <p:nvSpPr>
+          <p:cNvPr id="4" name="TextBox 3"/>
+          <p:cNvSpPr txBox="1"/>
+          <p:nvPr/>
+        </p:nvSpPr>
+        <p:spPr>
+          <a:xfrm>
+            <a:off x="822960" y="2880360"/>
+            <a:ext cx="10515600" cy="914400"/>
+          </a:xfrm>
+          <a:prstGeom prst="rect">
+            <a:avLst/>
+          </a:prstGeom>
+          <a:noFill/>
+        </p:spPr>
+        <p:txBody>
+          <a:bodyPr wrap="square">
+            <a:spAutoFit/>
+          </a:bodyPr>
+          <a:lstStyle/>
+          <a:p>
+            <a:pPr algn="r" rtl="1">
+              <a:lnSpc>
+                <a:spcPct val="190000"/>
+              </a:lnSpc>
+            </a:pPr>
+            <a:r>
+              <a:rPr sz="4000" b="0" i="0">
                 <a:solidFill>
                   <a:srgbClr val="C49A45"/>
                 </a:solidFill>
-                <a:latin typeface="Georgia"/>
-                <a:cs typeface="Jameel Noori Nastaleeq"/>
+                <a:latin typeface="Noto Nastaliq Urdu"/>
+                <a:cs typeface="Noto Nastaliq Urdu"/>
               </a:rPr>
-              <a:t>Lessons from History  ·  نشست ۱</a:t>
+              <a:t>تاریخ سے سبق</a:t>
             </a:r>
           </a:p>
         </p:txBody>
@@ -4921,8 +5107,8 @@
         </p:nvSpPr>
         <p:spPr>
           <a:xfrm>
-            <a:off x="822960" y="3977639"/>
-            <a:ext cx="2926080" cy="25400"/>
+            <a:off x="822960" y="4160520"/>
+            <a:ext cx="2377440" cy="31750"/>
           </a:xfrm>
           <a:prstGeom prst="rect">
             <a:avLst/>
@@ -4965,8 +5151,8 @@
         </p:nvSpPr>
         <p:spPr>
           <a:xfrm>
-            <a:off x="822960" y="4297680"/>
-            <a:ext cx="10515600" cy="822960"/>
+            <a:off x="822960" y="4434840"/>
+            <a:ext cx="10515600" cy="731520"/>
           </a:xfrm>
           <a:prstGeom prst="rect">
             <a:avLst/>
@@ -4979,20 +5165,19 @@
           </a:bodyPr>
           <a:lstStyle/>
           <a:p>
-            <a:pPr algn="r" rtl="1">
+            <a:pPr algn="l">
               <a:lnSpc>
                 <a:spcPct val="100000"/>
               </a:lnSpc>
             </a:pPr>
             <a:r>
-              <a:rPr sz="2600" b="0">
+              <a:rPr sz="2400" b="0" i="1">
                 <a:solidFill>
                   <a:srgbClr val="FAF7F0"/>
                 </a:solidFill>
                 <a:latin typeface="Georgia"/>
-                <a:cs typeface="Traditional Arabic"/>
               </a:rPr>
-              <a:t>وَأَسْبَابِ مَبَادِئِ الدُّوَلِ وَإِقْبَالِهَا، ثُمَّ سَبَبِ انْقِرَاضِهَا</a:t>
+              <a:t>Fourteen centuries in one evening</a:t>
             </a:r>
           </a:p>
         </p:txBody>
@@ -5005,7 +5190,7 @@
         </p:nvSpPr>
         <p:spPr>
           <a:xfrm>
-            <a:off x="822960" y="5212080"/>
+            <a:off x="822960" y="5760720"/>
             <a:ext cx="10515600" cy="457200"/>
           </a:xfrm>
           <a:prstGeom prst="rect">
@@ -5019,20 +5204,19 @@
           </a:bodyPr>
           <a:lstStyle/>
           <a:p>
-            <a:pPr algn="r" rtl="1">
+            <a:pPr algn="l">
               <a:lnSpc>
                 <a:spcPct val="100000"/>
               </a:lnSpc>
             </a:pPr>
             <a:r>
-              <a:rPr sz="1500" b="0">
+              <a:rPr sz="1300" b="1" i="0">
                 <a:solidFill>
                   <a:srgbClr val="C49A45"/>
                 </a:solidFill>
-                <a:latin typeface="Georgia"/>
-                <a:cs typeface="Jameel Noori Nastaleeq"/>
+                <a:latin typeface="Segoe UI"/>
               </a:rPr>
-              <a:t>علامہ سخاوی رحمہ اللہ  ·  الإعلان بالتوبيخ، ص۱۱۱</a:t>
+              <a:t>SESSION 1  ·  632 – 1947  ·  DHA ISLAMABAD</a:t>
             </a:r>
           </a:p>
         </p:txBody>
@@ -5070,7 +5254,7 @@
             <a:avLst/>
           </a:prstGeom>
           <a:solidFill>
-            <a:srgbClr val="104A43"/>
+            <a:srgbClr val="0A322E"/>
           </a:solidFill>
           <a:ln>
             <a:noFill/>
@@ -5107,8 +5291,8 @@
         </p:nvSpPr>
         <p:spPr>
           <a:xfrm>
-            <a:off x="822960" y="2651760"/>
-            <a:ext cx="10515600" cy="1280160"/>
+            <a:off x="777240" y="420624"/>
+            <a:ext cx="8229600" cy="365760"/>
           </a:xfrm>
           <a:prstGeom prst="rect">
             <a:avLst/>
@@ -5121,20 +5305,19 @@
           </a:bodyPr>
           <a:lstStyle/>
           <a:p>
-            <a:pPr algn="ctr">
+            <a:pPr algn="l">
               <a:lnSpc>
                 <a:spcPct val="100000"/>
               </a:lnSpc>
             </a:pPr>
             <a:r>
-              <a:rPr sz="6400" b="0">
-                <a:solidFill>
-                  <a:srgbClr val="FAF7F0"/>
-                </a:solidFill>
-                <a:latin typeface="Georgia"/>
-                <a:cs typeface="Jameel Noori Nastaleeq"/>
+              <a:rPr sz="1200" b="1" i="0">
+                <a:solidFill>
+                  <a:srgbClr val="C49A45"/>
+                </a:solidFill>
+                <a:latin typeface="Segoe UI"/>
               </a:rPr>
-              <a:t>تعارف</a:t>
+              <a:t>MOVE 6</a:t>
             </a:r>
           </a:p>
         </p:txBody>
@@ -5147,8 +5330,47 @@
         </p:nvSpPr>
         <p:spPr>
           <a:xfrm>
-            <a:off x="822960" y="4023360"/>
-            <a:ext cx="10515600" cy="640080"/>
+            <a:off x="822960" y="1965960"/>
+            <a:ext cx="10515600" cy="2011680"/>
+          </a:xfrm>
+          <a:prstGeom prst="rect">
+            <a:avLst/>
+          </a:prstGeom>
+          <a:noFill/>
+        </p:spPr>
+        <p:txBody>
+          <a:bodyPr wrap="square" anchor="ctr">
+            <a:spAutoFit/>
+          </a:bodyPr>
+          <a:lstStyle/>
+          <a:p>
+            <a:pPr algn="l">
+              <a:lnSpc>
+                <a:spcPct val="120000"/>
+              </a:lnSpc>
+            </a:pPr>
+            <a:r>
+              <a:rPr sz="5200" b="0" i="0">
+                <a:solidFill>
+                  <a:srgbClr val="C49A45"/>
+                </a:solidFill>
+                <a:latin typeface="Georgia"/>
+              </a:rPr>
+              <a:t>1924 … and then 1947.</a:t>
+            </a:r>
+          </a:p>
+        </p:txBody>
+      </p:sp>
+      <p:sp>
+        <p:nvSpPr>
+          <p:cNvPr id="5" name="TextBox 4"/>
+          <p:cNvSpPr txBox="1"/>
+          <p:nvPr/>
+        </p:nvSpPr>
+        <p:spPr>
+          <a:xfrm>
+            <a:off x="822960" y="4160520"/>
+            <a:ext cx="10515600" cy="914400"/>
           </a:xfrm>
           <a:prstGeom prst="rect">
             <a:avLst/>
@@ -5161,24 +5383,47 @@
           </a:bodyPr>
           <a:lstStyle/>
           <a:p>
-            <a:pPr algn="r" rtl="1">
+            <a:pPr algn="l">
               <a:lnSpc>
-                <a:spcPct val="100000"/>
+                <a:spcPct val="130000"/>
               </a:lnSpc>
             </a:pPr>
             <a:r>
-              <a:rPr sz="2200" b="0">
+              <a:rPr sz="2300" b="0" i="1">
                 <a:solidFill>
                   <a:srgbClr val="C49A45"/>
                 </a:solidFill>
                 <a:latin typeface="Georgia"/>
-                <a:cs typeface="Jameel Noori Nastaleeq"/>
               </a:rPr>
-              <a:t>تین لوگ  ·  تینوں کی اپنی نشست آ رہی ہے</a:t>
-            </a:r>
-          </a:p>
-        </p:txBody>
-      </p:sp>
+              <a:t>The last caliphate ends. And the story arrives here.</a:t>
+            </a:r>
+          </a:p>
+        </p:txBody>
+      </p:sp>
+      <p:pic>
+        <p:nvPicPr>
+          <p:cNvPr id="6" name="Picture 5" descr="line_s9.png"/>
+          <p:cNvPicPr>
+            <a:picLocks noChangeAspect="1"/>
+          </p:cNvPicPr>
+          <p:nvPr/>
+        </p:nvPicPr>
+        <p:blipFill>
+          <a:blip r:embed="rId2"/>
+          <a:stretch>
+            <a:fillRect/>
+          </a:stretch>
+        </p:blipFill>
+        <p:spPr>
+          <a:xfrm>
+            <a:off x="548640" y="6053328"/>
+            <a:ext cx="11091672" cy="1170788"/>
+          </a:xfrm>
+          <a:prstGeom prst="rect">
+            <a:avLst/>
+          </a:prstGeom>
+        </p:spPr>
+      </p:pic>
     </p:spTree>
   </p:cSld>
   <p:clrMapOvr>
@@ -5212,7 +5457,7 @@
             <a:avLst/>
           </a:prstGeom>
           <a:solidFill>
-            <a:srgbClr val="FAF7F0"/>
+            <a:srgbClr val="104A43"/>
           </a:solidFill>
           <a:ln>
             <a:noFill/>
@@ -5249,8 +5494,8 @@
         </p:nvSpPr>
         <p:spPr>
           <a:xfrm>
-            <a:off x="822960" y="2103120"/>
-            <a:ext cx="10515600" cy="1280160"/>
+            <a:off x="777240" y="420624"/>
+            <a:ext cx="8229600" cy="365760"/>
           </a:xfrm>
           <a:prstGeom prst="rect">
             <a:avLst/>
@@ -5263,104 +5508,97 @@
           </a:bodyPr>
           <a:lstStyle/>
           <a:p>
-            <a:pPr algn="r" rtl="1">
-              <a:lnSpc>
-                <a:spcPct val="160000"/>
-              </a:lnSpc>
-            </a:pPr>
-            <a:r>
-              <a:rPr sz="4600" b="0">
-                <a:solidFill>
-                  <a:srgbClr val="104A43"/>
-                </a:solidFill>
-                <a:latin typeface="Georgia"/>
-                <a:cs typeface="Jameel Noori Nastaleeq"/>
-              </a:rPr>
-              <a:t>سیدنا عمر الفاروق ؓ</a:t>
-            </a:r>
-          </a:p>
-        </p:txBody>
-      </p:sp>
-      <p:sp>
-        <p:nvSpPr>
-          <p:cNvPr id="4" name="Rectangle 3"/>
-          <p:cNvSpPr/>
-          <p:nvPr/>
-        </p:nvSpPr>
-        <p:spPr>
-          <a:xfrm>
-            <a:off x="8778240" y="3566160"/>
-            <a:ext cx="2560320" cy="25400"/>
-          </a:xfrm>
-          <a:prstGeom prst="rect">
-            <a:avLst/>
-          </a:prstGeom>
-          <a:solidFill>
-            <a:srgbClr val="C49A45"/>
-          </a:solidFill>
-          <a:ln>
-            <a:noFill/>
-          </a:ln>
-          <a:effectLst/>
-        </p:spPr>
-        <p:style>
-          <a:lnRef idx="1">
-            <a:schemeClr val="accent1"/>
-          </a:lnRef>
-          <a:fillRef idx="3">
-            <a:schemeClr val="accent1"/>
-          </a:fillRef>
-          <a:effectRef idx="2">
-            <a:schemeClr val="accent1"/>
-          </a:effectRef>
-          <a:fontRef idx="minor">
-            <a:schemeClr val="lt1"/>
-          </a:fontRef>
-        </p:style>
-        <p:txBody>
-          <a:bodyPr rtlCol="0" anchor="ctr"/>
-          <a:lstStyle/>
-          <a:p>
-            <a:pPr algn="ctr"/>
-          </a:p>
-        </p:txBody>
-      </p:sp>
-      <p:sp>
-        <p:nvSpPr>
-          <p:cNvPr id="5" name="TextBox 4"/>
-          <p:cNvSpPr txBox="1"/>
-          <p:nvPr/>
-        </p:nvSpPr>
-        <p:spPr>
-          <a:xfrm>
-            <a:off x="822960" y="3840480"/>
-            <a:ext cx="10515600" cy="640080"/>
-          </a:xfrm>
-          <a:prstGeom prst="rect">
-            <a:avLst/>
-          </a:prstGeom>
-          <a:noFill/>
-        </p:spPr>
-        <p:txBody>
-          <a:bodyPr wrap="square">
-            <a:spAutoFit/>
-          </a:bodyPr>
-          <a:lstStyle/>
-          <a:p>
-            <a:pPr algn="r" rtl="1">
+            <a:pPr algn="l">
               <a:lnSpc>
                 <a:spcPct val="100000"/>
               </a:lnSpc>
             </a:pPr>
             <a:r>
-              <a:rPr sz="2200" b="0">
+              <a:rPr sz="1200" b="1" i="0">
                 <a:solidFill>
                   <a:srgbClr val="C49A45"/>
                 </a:solidFill>
+                <a:latin typeface="Segoe UI"/>
+              </a:rPr>
+              <a:t>تعارف  ·  WHO YOU ARE MEETING</a:t>
+            </a:r>
+          </a:p>
+        </p:txBody>
+      </p:sp>
+      <p:sp>
+        <p:nvSpPr>
+          <p:cNvPr id="4" name="TextBox 3"/>
+          <p:cNvSpPr txBox="1"/>
+          <p:nvPr/>
+        </p:nvSpPr>
+        <p:spPr>
+          <a:xfrm>
+            <a:off x="822960" y="1965960"/>
+            <a:ext cx="10515600" cy="2011680"/>
+          </a:xfrm>
+          <a:prstGeom prst="rect">
+            <a:avLst/>
+          </a:prstGeom>
+          <a:noFill/>
+        </p:spPr>
+        <p:txBody>
+          <a:bodyPr wrap="square" anchor="ctr">
+            <a:spAutoFit/>
+          </a:bodyPr>
+          <a:lstStyle/>
+          <a:p>
+            <a:pPr algn="l">
+              <a:lnSpc>
+                <a:spcPct val="120000"/>
+              </a:lnSpc>
+            </a:pPr>
+            <a:r>
+              <a:rPr sz="5200" b="0" i="0">
+                <a:solidFill>
+                  <a:srgbClr val="FAF7F0"/>
+                </a:solidFill>
                 <a:latin typeface="Georgia"/>
-                <a:cs typeface="Jameel Noori Nastaleeq"/>
               </a:rPr>
-              <a:t>اگلے ہفتے</a:t>
+              <a:t>Three people</a:t>
+            </a:r>
+          </a:p>
+        </p:txBody>
+      </p:sp>
+      <p:sp>
+        <p:nvSpPr>
+          <p:cNvPr id="5" name="TextBox 4"/>
+          <p:cNvSpPr txBox="1"/>
+          <p:nvPr/>
+        </p:nvSpPr>
+        <p:spPr>
+          <a:xfrm>
+            <a:off x="822960" y="4160520"/>
+            <a:ext cx="10515600" cy="914400"/>
+          </a:xfrm>
+          <a:prstGeom prst="rect">
+            <a:avLst/>
+          </a:prstGeom>
+          <a:noFill/>
+        </p:spPr>
+        <p:txBody>
+          <a:bodyPr wrap="square">
+            <a:spAutoFit/>
+          </a:bodyPr>
+          <a:lstStyle/>
+          <a:p>
+            <a:pPr algn="l">
+              <a:lnSpc>
+                <a:spcPct val="130000"/>
+              </a:lnSpc>
+            </a:pPr>
+            <a:r>
+              <a:rPr sz="2300" b="0" i="1">
+                <a:solidFill>
+                  <a:srgbClr val="C49A45"/>
+                </a:solidFill>
+                <a:latin typeface="Georgia"/>
+              </a:rPr>
+              <a:t>Each one has their own evening later in the course.</a:t>
             </a:r>
           </a:p>
         </p:txBody>
@@ -5435,8 +5673,8 @@
         </p:nvSpPr>
         <p:spPr>
           <a:xfrm>
-            <a:off x="822960" y="2103120"/>
-            <a:ext cx="10515600" cy="1280160"/>
+            <a:off x="777240" y="420624"/>
+            <a:ext cx="8229600" cy="365760"/>
           </a:xfrm>
           <a:prstGeom prst="rect">
             <a:avLst/>
@@ -5449,34 +5687,112 @@
           </a:bodyPr>
           <a:lstStyle/>
           <a:p>
+            <a:pPr algn="l">
+              <a:lnSpc>
+                <a:spcPct val="100000"/>
+              </a:lnSpc>
+            </a:pPr>
+            <a:r>
+              <a:rPr sz="1200" b="1" i="0">
+                <a:solidFill>
+                  <a:srgbClr val="104A43"/>
+                </a:solidFill>
+                <a:latin typeface="Segoe UI"/>
+              </a:rPr>
+              <a:t>WHO YOU ARE MEETING</a:t>
+            </a:r>
+          </a:p>
+        </p:txBody>
+      </p:sp>
+      <p:sp>
+        <p:nvSpPr>
+          <p:cNvPr id="4" name="TextBox 3"/>
+          <p:cNvSpPr txBox="1"/>
+          <p:nvPr/>
+        </p:nvSpPr>
+        <p:spPr>
+          <a:xfrm>
+            <a:off x="777240" y="960120"/>
+            <a:ext cx="7680960" cy="822960"/>
+          </a:xfrm>
+          <a:prstGeom prst="rect">
+            <a:avLst/>
+          </a:prstGeom>
+          <a:noFill/>
+        </p:spPr>
+        <p:txBody>
+          <a:bodyPr wrap="square">
+            <a:spAutoFit/>
+          </a:bodyPr>
+          <a:lstStyle/>
+          <a:p>
+            <a:pPr algn="l">
+              <a:lnSpc>
+                <a:spcPct val="100000"/>
+              </a:lnSpc>
+            </a:pPr>
+            <a:r>
+              <a:rPr sz="4000" b="0" i="0">
+                <a:solidFill>
+                  <a:srgbClr val="104A43"/>
+                </a:solidFill>
+                <a:latin typeface="Georgia"/>
+              </a:rPr>
+              <a:t>Umar ibn al-Khattab</a:t>
+            </a:r>
+          </a:p>
+        </p:txBody>
+      </p:sp>
+      <p:sp>
+        <p:nvSpPr>
+          <p:cNvPr id="5" name="TextBox 4"/>
+          <p:cNvSpPr txBox="1"/>
+          <p:nvPr/>
+        </p:nvSpPr>
+        <p:spPr>
+          <a:xfrm>
+            <a:off x="7863840" y="914400"/>
+            <a:ext cx="3566160" cy="822960"/>
+          </a:xfrm>
+          <a:prstGeom prst="rect">
+            <a:avLst/>
+          </a:prstGeom>
+          <a:noFill/>
+        </p:spPr>
+        <p:txBody>
+          <a:bodyPr wrap="square">
+            <a:spAutoFit/>
+          </a:bodyPr>
+          <a:lstStyle/>
+          <a:p>
             <a:pPr algn="r" rtl="1">
               <a:lnSpc>
-                <a:spcPct val="160000"/>
+                <a:spcPct val="190000"/>
               </a:lnSpc>
             </a:pPr>
             <a:r>
-              <a:rPr sz="4600" b="0">
+              <a:rPr sz="3000" b="0" i="0">
                 <a:solidFill>
                   <a:srgbClr val="104A43"/>
                 </a:solidFill>
-                <a:latin typeface="Georgia"/>
-                <a:cs typeface="Jameel Noori Nastaleeq"/>
+                <a:latin typeface="Noto Nastaliq Urdu"/>
+                <a:cs typeface="Noto Nastaliq Urdu"/>
               </a:rPr>
-              <a:t>ہلاکو خان</a:t>
-            </a:r>
-          </a:p>
-        </p:txBody>
-      </p:sp>
-      <p:sp>
-        <p:nvSpPr>
-          <p:cNvPr id="4" name="Rectangle 3"/>
+              <a:t>سیدنا عمر الفاروق ؓ</a:t>
+            </a:r>
+          </a:p>
+        </p:txBody>
+      </p:sp>
+      <p:sp>
+        <p:nvSpPr>
+          <p:cNvPr id="6" name="Rectangle 5"/>
           <p:cNvSpPr/>
           <p:nvPr/>
         </p:nvSpPr>
         <p:spPr>
           <a:xfrm>
-            <a:off x="8778240" y="3566160"/>
-            <a:ext cx="2560320" cy="25400"/>
+            <a:off x="777240" y="1810512"/>
+            <a:ext cx="10607040" cy="566928"/>
           </a:xfrm>
           <a:prstGeom prst="rect">
             <a:avLst/>
@@ -5513,14 +5829,14 @@
       </p:sp>
       <p:sp>
         <p:nvSpPr>
-          <p:cNvPr id="5" name="TextBox 4"/>
+          <p:cNvPr id="7" name="TextBox 6"/>
           <p:cNvSpPr txBox="1"/>
           <p:nvPr/>
         </p:nvSpPr>
         <p:spPr>
           <a:xfrm>
-            <a:off x="822960" y="3840480"/>
-            <a:ext cx="10515600" cy="640080"/>
+            <a:off x="960120" y="1883664"/>
+            <a:ext cx="6400800" cy="457200"/>
           </a:xfrm>
           <a:prstGeom prst="rect">
             <a:avLst/>
@@ -5533,20 +5849,314 @@
           </a:bodyPr>
           <a:lstStyle/>
           <a:p>
-            <a:pPr algn="r" rtl="1">
+            <a:pPr algn="l">
               <a:lnSpc>
                 <a:spcPct val="100000"/>
               </a:lnSpc>
             </a:pPr>
             <a:r>
-              <a:rPr sz="2200" b="0">
-                <a:solidFill>
-                  <a:srgbClr val="C49A45"/>
+              <a:rPr sz="1900" b="1" i="0">
+                <a:solidFill>
+                  <a:srgbClr val="0A322E"/>
+                </a:solidFill>
+                <a:latin typeface="Segoe UI"/>
+              </a:rPr>
+              <a:t>AL-FARUQ — the one who separates truth from falsehood</a:t>
+            </a:r>
+          </a:p>
+        </p:txBody>
+      </p:sp>
+      <p:sp>
+        <p:nvSpPr>
+          <p:cNvPr id="8" name="TextBox 7"/>
+          <p:cNvSpPr txBox="1"/>
+          <p:nvPr/>
+        </p:nvSpPr>
+        <p:spPr>
+          <a:xfrm>
+            <a:off x="7315200" y="1828800"/>
+            <a:ext cx="3931920" cy="502920"/>
+          </a:xfrm>
+          <a:prstGeom prst="rect">
+            <a:avLst/>
+          </a:prstGeom>
+          <a:noFill/>
+        </p:spPr>
+        <p:txBody>
+          <a:bodyPr wrap="square">
+            <a:spAutoFit/>
+          </a:bodyPr>
+          <a:lstStyle/>
+          <a:p>
+            <a:pPr algn="r" rtl="1">
+              <a:lnSpc>
+                <a:spcPct val="170000"/>
+              </a:lnSpc>
+            </a:pPr>
+            <a:r>
+              <a:rPr sz="2000" b="0" i="0">
+                <a:solidFill>
+                  <a:srgbClr val="0A322E"/>
+                </a:solidFill>
+                <a:latin typeface="Noto Nastaliq Urdu"/>
+                <a:cs typeface="Noto Nastaliq Urdu"/>
+              </a:rPr>
+              <a:t>الفاروق</a:t>
+            </a:r>
+          </a:p>
+        </p:txBody>
+      </p:sp>
+      <p:sp>
+        <p:nvSpPr>
+          <p:cNvPr id="9" name="TextBox 8"/>
+          <p:cNvSpPr txBox="1"/>
+          <p:nvPr/>
+        </p:nvSpPr>
+        <p:spPr>
+          <a:xfrm>
+            <a:off x="777240" y="2633472"/>
+            <a:ext cx="10607040" cy="411480"/>
+          </a:xfrm>
+          <a:prstGeom prst="rect">
+            <a:avLst/>
+          </a:prstGeom>
+          <a:noFill/>
+        </p:spPr>
+        <p:txBody>
+          <a:bodyPr wrap="square">
+            <a:spAutoFit/>
+          </a:bodyPr>
+          <a:lstStyle/>
+          <a:p>
+            <a:pPr algn="l">
+              <a:lnSpc>
+                <a:spcPct val="100000"/>
+              </a:lnSpc>
+            </a:pPr>
+            <a:r>
+              <a:rPr sz="1500" b="1" i="0">
+                <a:solidFill>
+                  <a:srgbClr val="5A6862"/>
+                </a:solidFill>
+                <a:latin typeface="Segoe UI"/>
+              </a:rPr>
+              <a:t>SECOND CALIPH  ·  COMES BACK IN SESSION 2</a:t>
+            </a:r>
+          </a:p>
+        </p:txBody>
+      </p:sp>
+      <p:sp>
+        <p:nvSpPr>
+          <p:cNvPr id="10" name="TextBox 9"/>
+          <p:cNvSpPr txBox="1"/>
+          <p:nvPr/>
+        </p:nvSpPr>
+        <p:spPr>
+          <a:xfrm>
+            <a:off x="777240" y="3108960"/>
+            <a:ext cx="10607040" cy="1188720"/>
+          </a:xfrm>
+          <a:prstGeom prst="rect">
+            <a:avLst/>
+          </a:prstGeom>
+          <a:noFill/>
+        </p:spPr>
+        <p:txBody>
+          <a:bodyPr wrap="square">
+            <a:spAutoFit/>
+          </a:bodyPr>
+          <a:lstStyle/>
+          <a:p>
+            <a:pPr algn="l">
+              <a:lnSpc>
+                <a:spcPct val="130000"/>
+              </a:lnSpc>
+            </a:pPr>
+            <a:r>
+              <a:rPr sz="2200" b="0" i="0">
+                <a:solidFill>
+                  <a:srgbClr val="1C2321"/>
                 </a:solidFill>
                 <a:latin typeface="Georgia"/>
-                <a:cs typeface="Jameel Noori Nastaleeq"/>
               </a:rPr>
-              <a:t>چھٹی نشست</a:t>
+              <a:t>In his time Persia was ended and Byzantium lost Syria and Egypt — and he built the</a:t>
+            </a:r>
+          </a:p>
+          <a:p>
+            <a:pPr algn="l">
+              <a:lnSpc>
+                <a:spcPct val="130000"/>
+              </a:lnSpc>
+            </a:pPr>
+            <a:r>
+              <a:rPr sz="2200" b="0" i="0">
+                <a:solidFill>
+                  <a:srgbClr val="1C2321"/>
+                </a:solidFill>
+                <a:latin typeface="Georgia"/>
+              </a:rPr>
+              <a:t>administration that governed it.</a:t>
+            </a:r>
+          </a:p>
+        </p:txBody>
+      </p:sp>
+      <p:sp>
+        <p:nvSpPr>
+          <p:cNvPr id="11" name="Rectangle 10"/>
+          <p:cNvSpPr/>
+          <p:nvPr/>
+        </p:nvSpPr>
+        <p:spPr>
+          <a:xfrm>
+            <a:off x="777240" y="4315968"/>
+            <a:ext cx="1463040" cy="25400"/>
+          </a:xfrm>
+          <a:prstGeom prst="rect">
+            <a:avLst/>
+          </a:prstGeom>
+          <a:solidFill>
+            <a:srgbClr val="C49A45"/>
+          </a:solidFill>
+          <a:ln>
+            <a:noFill/>
+          </a:ln>
+          <a:effectLst/>
+        </p:spPr>
+        <p:style>
+          <a:lnRef idx="1">
+            <a:schemeClr val="accent1"/>
+          </a:lnRef>
+          <a:fillRef idx="3">
+            <a:schemeClr val="accent1"/>
+          </a:fillRef>
+          <a:effectRef idx="2">
+            <a:schemeClr val="accent1"/>
+          </a:effectRef>
+          <a:fontRef idx="minor">
+            <a:schemeClr val="lt1"/>
+          </a:fontRef>
+        </p:style>
+        <p:txBody>
+          <a:bodyPr rtlCol="0" anchor="ctr"/>
+          <a:lstStyle/>
+          <a:p>
+            <a:pPr algn="ctr"/>
+          </a:p>
+        </p:txBody>
+      </p:sp>
+      <p:sp>
+        <p:nvSpPr>
+          <p:cNvPr id="12" name="TextBox 11"/>
+          <p:cNvSpPr txBox="1"/>
+          <p:nvPr/>
+        </p:nvSpPr>
+        <p:spPr>
+          <a:xfrm>
+            <a:off x="777240" y="4480560"/>
+            <a:ext cx="3657600" cy="320040"/>
+          </a:xfrm>
+          <a:prstGeom prst="rect">
+            <a:avLst/>
+          </a:prstGeom>
+          <a:noFill/>
+        </p:spPr>
+        <p:txBody>
+          <a:bodyPr wrap="square">
+            <a:spAutoFit/>
+          </a:bodyPr>
+          <a:lstStyle/>
+          <a:p>
+            <a:pPr algn="l">
+              <a:lnSpc>
+                <a:spcPct val="100000"/>
+              </a:lnSpc>
+            </a:pPr>
+            <a:r>
+              <a:rPr sz="1100" b="1" i="0">
+                <a:solidFill>
+                  <a:srgbClr val="5A6862"/>
+                </a:solidFill>
+                <a:latin typeface="Segoe UI"/>
+              </a:rPr>
+              <a:t>ONE INCIDENT</a:t>
+            </a:r>
+          </a:p>
+        </p:txBody>
+      </p:sp>
+      <p:sp>
+        <p:nvSpPr>
+          <p:cNvPr id="13" name="TextBox 12"/>
+          <p:cNvSpPr txBox="1"/>
+          <p:nvPr/>
+        </p:nvSpPr>
+        <p:spPr>
+          <a:xfrm>
+            <a:off x="777240" y="4809744"/>
+            <a:ext cx="10607040" cy="1143000"/>
+          </a:xfrm>
+          <a:prstGeom prst="rect">
+            <a:avLst/>
+          </a:prstGeom>
+          <a:noFill/>
+        </p:spPr>
+        <p:txBody>
+          <a:bodyPr wrap="square">
+            <a:spAutoFit/>
+          </a:bodyPr>
+          <a:lstStyle/>
+          <a:p>
+            <a:pPr algn="l">
+              <a:lnSpc>
+                <a:spcPct val="130000"/>
+              </a:lnSpc>
+            </a:pPr>
+            <a:r>
+              <a:rPr sz="2000" b="0" i="1">
+                <a:solidFill>
+                  <a:srgbClr val="0A322E"/>
+                </a:solidFill>
+                <a:latin typeface="Georgia"/>
+              </a:rPr>
+              <a:t>—</a:t>
+            </a:r>
+          </a:p>
+        </p:txBody>
+      </p:sp>
+      <p:sp>
+        <p:nvSpPr>
+          <p:cNvPr id="14" name="TextBox 13"/>
+          <p:cNvSpPr txBox="1"/>
+          <p:nvPr/>
+        </p:nvSpPr>
+        <p:spPr>
+          <a:xfrm>
+            <a:off x="777240" y="6053328"/>
+            <a:ext cx="10607040" cy="365760"/>
+          </a:xfrm>
+          <a:prstGeom prst="rect">
+            <a:avLst/>
+          </a:prstGeom>
+          <a:noFill/>
+        </p:spPr>
+        <p:txBody>
+          <a:bodyPr wrap="square">
+            <a:spAutoFit/>
+          </a:bodyPr>
+          <a:lstStyle/>
+          <a:p>
+            <a:pPr algn="l">
+              <a:lnSpc>
+                <a:spcPct val="100000"/>
+              </a:lnSpc>
+            </a:pPr>
+            <a:r>
+              <a:rPr sz="1200" b="0" i="0">
+                <a:solidFill>
+                  <a:srgbClr val="104A43"/>
+                </a:solidFill>
+                <a:latin typeface="Segoe UI"/>
+              </a:rPr>
+              <a:t>[SOURCE: Siyar A'lam al-Nubala — dates and one incident, read off the page]</a:t>
             </a:r>
           </a:p>
         </p:txBody>
@@ -5621,8 +6231,8 @@
         </p:nvSpPr>
         <p:spPr>
           <a:xfrm>
-            <a:off x="822960" y="2103120"/>
-            <a:ext cx="10515600" cy="1280160"/>
+            <a:off x="777240" y="420624"/>
+            <a:ext cx="8229600" cy="365760"/>
           </a:xfrm>
           <a:prstGeom prst="rect">
             <a:avLst/>
@@ -5635,34 +6245,190 @@
           </a:bodyPr>
           <a:lstStyle/>
           <a:p>
+            <a:pPr algn="l">
+              <a:lnSpc>
+                <a:spcPct val="100000"/>
+              </a:lnSpc>
+            </a:pPr>
+            <a:r>
+              <a:rPr sz="1200" b="1" i="0">
+                <a:solidFill>
+                  <a:srgbClr val="104A43"/>
+                </a:solidFill>
+                <a:latin typeface="Segoe UI"/>
+              </a:rPr>
+              <a:t>WHO YOU ARE MEETING</a:t>
+            </a:r>
+          </a:p>
+        </p:txBody>
+      </p:sp>
+      <p:sp>
+        <p:nvSpPr>
+          <p:cNvPr id="4" name="TextBox 3"/>
+          <p:cNvSpPr txBox="1"/>
+          <p:nvPr/>
+        </p:nvSpPr>
+        <p:spPr>
+          <a:xfrm>
+            <a:off x="777240" y="960120"/>
+            <a:ext cx="7680960" cy="822960"/>
+          </a:xfrm>
+          <a:prstGeom prst="rect">
+            <a:avLst/>
+          </a:prstGeom>
+          <a:noFill/>
+        </p:spPr>
+        <p:txBody>
+          <a:bodyPr wrap="square">
+            <a:spAutoFit/>
+          </a:bodyPr>
+          <a:lstStyle/>
+          <a:p>
+            <a:pPr algn="l">
+              <a:lnSpc>
+                <a:spcPct val="100000"/>
+              </a:lnSpc>
+            </a:pPr>
+            <a:r>
+              <a:rPr sz="4000" b="0" i="0">
+                <a:solidFill>
+                  <a:srgbClr val="104A43"/>
+                </a:solidFill>
+                <a:latin typeface="Georgia"/>
+              </a:rPr>
+              <a:t>Hulagu Khan</a:t>
+            </a:r>
+          </a:p>
+        </p:txBody>
+      </p:sp>
+      <p:sp>
+        <p:nvSpPr>
+          <p:cNvPr id="5" name="TextBox 4"/>
+          <p:cNvSpPr txBox="1"/>
+          <p:nvPr/>
+        </p:nvSpPr>
+        <p:spPr>
+          <a:xfrm>
+            <a:off x="7863840" y="914400"/>
+            <a:ext cx="3566160" cy="822960"/>
+          </a:xfrm>
+          <a:prstGeom prst="rect">
+            <a:avLst/>
+          </a:prstGeom>
+          <a:noFill/>
+        </p:spPr>
+        <p:txBody>
+          <a:bodyPr wrap="square">
+            <a:spAutoFit/>
+          </a:bodyPr>
+          <a:lstStyle/>
+          <a:p>
             <a:pPr algn="r" rtl="1">
               <a:lnSpc>
-                <a:spcPct val="160000"/>
+                <a:spcPct val="190000"/>
               </a:lnSpc>
             </a:pPr>
             <a:r>
-              <a:rPr sz="4600" b="0">
+              <a:rPr sz="3000" b="0" i="0">
                 <a:solidFill>
                   <a:srgbClr val="104A43"/>
                 </a:solidFill>
+                <a:latin typeface="Noto Nastaliq Urdu"/>
+                <a:cs typeface="Noto Nastaliq Urdu"/>
+              </a:rPr>
+              <a:t>ہلاکو خان</a:t>
+            </a:r>
+          </a:p>
+        </p:txBody>
+      </p:sp>
+      <p:sp>
+        <p:nvSpPr>
+          <p:cNvPr id="6" name="TextBox 5"/>
+          <p:cNvSpPr txBox="1"/>
+          <p:nvPr/>
+        </p:nvSpPr>
+        <p:spPr>
+          <a:xfrm>
+            <a:off x="777240" y="2633472"/>
+            <a:ext cx="10607040" cy="411480"/>
+          </a:xfrm>
+          <a:prstGeom prst="rect">
+            <a:avLst/>
+          </a:prstGeom>
+          <a:noFill/>
+        </p:spPr>
+        <p:txBody>
+          <a:bodyPr wrap="square">
+            <a:spAutoFit/>
+          </a:bodyPr>
+          <a:lstStyle/>
+          <a:p>
+            <a:pPr algn="l">
+              <a:lnSpc>
+                <a:spcPct val="100000"/>
+              </a:lnSpc>
+            </a:pPr>
+            <a:r>
+              <a:rPr sz="1500" b="1" i="0">
+                <a:solidFill>
+                  <a:srgbClr val="5A6862"/>
+                </a:solidFill>
+                <a:latin typeface="Segoe UI"/>
+              </a:rPr>
+              <a:t>COMES BACK IN SESSION 6</a:t>
+            </a:r>
+          </a:p>
+        </p:txBody>
+      </p:sp>
+      <p:sp>
+        <p:nvSpPr>
+          <p:cNvPr id="7" name="TextBox 6"/>
+          <p:cNvSpPr txBox="1"/>
+          <p:nvPr/>
+        </p:nvSpPr>
+        <p:spPr>
+          <a:xfrm>
+            <a:off x="777240" y="3108960"/>
+            <a:ext cx="10607040" cy="1188720"/>
+          </a:xfrm>
+          <a:prstGeom prst="rect">
+            <a:avLst/>
+          </a:prstGeom>
+          <a:noFill/>
+        </p:spPr>
+        <p:txBody>
+          <a:bodyPr wrap="square">
+            <a:spAutoFit/>
+          </a:bodyPr>
+          <a:lstStyle/>
+          <a:p>
+            <a:pPr algn="l">
+              <a:lnSpc>
+                <a:spcPct val="130000"/>
+              </a:lnSpc>
+            </a:pPr>
+            <a:r>
+              <a:rPr sz="2200" b="0" i="0">
+                <a:solidFill>
+                  <a:srgbClr val="1C2321"/>
+                </a:solidFill>
                 <a:latin typeface="Georgia"/>
-                <a:cs typeface="Jameel Noori Nastaleeq"/>
               </a:rPr>
-              <a:t>سلطان محمد فاتح</a:t>
-            </a:r>
-          </a:p>
-        </p:txBody>
-      </p:sp>
-      <p:sp>
-        <p:nvSpPr>
-          <p:cNvPr id="4" name="Rectangle 3"/>
+              <a:t>The Mongol commander who took Baghdad in 656 AH and ended the Abbasid caliphate there.</a:t>
+            </a:r>
+          </a:p>
+        </p:txBody>
+      </p:sp>
+      <p:sp>
+        <p:nvSpPr>
+          <p:cNvPr id="8" name="Rectangle 7"/>
           <p:cNvSpPr/>
           <p:nvPr/>
         </p:nvSpPr>
         <p:spPr>
           <a:xfrm>
-            <a:off x="8778240" y="3566160"/>
-            <a:ext cx="2560320" cy="25400"/>
+            <a:off x="777240" y="4315968"/>
+            <a:ext cx="1463040" cy="25400"/>
           </a:xfrm>
           <a:prstGeom prst="rect">
             <a:avLst/>
@@ -5699,14 +6465,14 @@
       </p:sp>
       <p:sp>
         <p:nvSpPr>
-          <p:cNvPr id="5" name="TextBox 4"/>
+          <p:cNvPr id="9" name="TextBox 8"/>
           <p:cNvSpPr txBox="1"/>
           <p:nvPr/>
         </p:nvSpPr>
         <p:spPr>
           <a:xfrm>
-            <a:off x="822960" y="3840480"/>
-            <a:ext cx="10515600" cy="640080"/>
+            <a:off x="777240" y="4480560"/>
+            <a:ext cx="3657600" cy="320040"/>
           </a:xfrm>
           <a:prstGeom prst="rect">
             <a:avLst/>
@@ -5719,20 +6485,97 @@
           </a:bodyPr>
           <a:lstStyle/>
           <a:p>
-            <a:pPr algn="r" rtl="1">
+            <a:pPr algn="l">
               <a:lnSpc>
                 <a:spcPct val="100000"/>
               </a:lnSpc>
             </a:pPr>
             <a:r>
-              <a:rPr sz="2200" b="0">
-                <a:solidFill>
-                  <a:srgbClr val="C49A45"/>
+              <a:rPr sz="1100" b="1" i="0">
+                <a:solidFill>
+                  <a:srgbClr val="5A6862"/>
+                </a:solidFill>
+                <a:latin typeface="Segoe UI"/>
+              </a:rPr>
+              <a:t>ONE INCIDENT</a:t>
+            </a:r>
+          </a:p>
+        </p:txBody>
+      </p:sp>
+      <p:sp>
+        <p:nvSpPr>
+          <p:cNvPr id="10" name="TextBox 9"/>
+          <p:cNvSpPr txBox="1"/>
+          <p:nvPr/>
+        </p:nvSpPr>
+        <p:spPr>
+          <a:xfrm>
+            <a:off x="777240" y="4809744"/>
+            <a:ext cx="10607040" cy="1143000"/>
+          </a:xfrm>
+          <a:prstGeom prst="rect">
+            <a:avLst/>
+          </a:prstGeom>
+          <a:noFill/>
+        </p:spPr>
+        <p:txBody>
+          <a:bodyPr wrap="square">
+            <a:spAutoFit/>
+          </a:bodyPr>
+          <a:lstStyle/>
+          <a:p>
+            <a:pPr algn="l">
+              <a:lnSpc>
+                <a:spcPct val="130000"/>
+              </a:lnSpc>
+            </a:pPr>
+            <a:r>
+              <a:rPr sz="2000" b="0" i="1">
+                <a:solidFill>
+                  <a:srgbClr val="0A322E"/>
                 </a:solidFill>
                 <a:latin typeface="Georgia"/>
-                <a:cs typeface="Jameel Noori Nastaleeq"/>
               </a:rPr>
-              <a:t>ساتویں نشست</a:t>
+              <a:t>—</a:t>
+            </a:r>
+          </a:p>
+        </p:txBody>
+      </p:sp>
+      <p:sp>
+        <p:nvSpPr>
+          <p:cNvPr id="11" name="TextBox 10"/>
+          <p:cNvSpPr txBox="1"/>
+          <p:nvPr/>
+        </p:nvSpPr>
+        <p:spPr>
+          <a:xfrm>
+            <a:off x="777240" y="6053328"/>
+            <a:ext cx="10607040" cy="365760"/>
+          </a:xfrm>
+          <a:prstGeom prst="rect">
+            <a:avLst/>
+          </a:prstGeom>
+          <a:noFill/>
+        </p:spPr>
+        <p:txBody>
+          <a:bodyPr wrap="square">
+            <a:spAutoFit/>
+          </a:bodyPr>
+          <a:lstStyle/>
+          <a:p>
+            <a:pPr algn="l">
+              <a:lnSpc>
+                <a:spcPct val="100000"/>
+              </a:lnSpc>
+            </a:pPr>
+            <a:r>
+              <a:rPr sz="1200" b="0" i="0">
+                <a:solidFill>
+                  <a:srgbClr val="104A43"/>
+                </a:solidFill>
+                <a:latin typeface="Segoe UI"/>
+              </a:rPr>
+              <a:t>[SOURCE: the Mongol volume]</a:t>
             </a:r>
           </a:p>
         </p:txBody>
@@ -5807,8 +6650,8 @@
         </p:nvSpPr>
         <p:spPr>
           <a:xfrm>
-            <a:off x="822960" y="457200"/>
-            <a:ext cx="7315200" cy="365760"/>
+            <a:off x="777240" y="420624"/>
+            <a:ext cx="8229600" cy="365760"/>
           </a:xfrm>
           <a:prstGeom prst="rect">
             <a:avLst/>
@@ -5827,14 +6670,13 @@
               </a:lnSpc>
             </a:pPr>
             <a:r>
-              <a:rPr sz="1200" b="1">
+              <a:rPr sz="1200" b="1" i="0">
                 <a:solidFill>
                   <a:srgbClr val="104A43"/>
                 </a:solidFill>
                 <a:latin typeface="Segoe UI"/>
-                <a:cs typeface="Jameel Noori Nastaleeq"/>
               </a:rPr>
-              <a:t>کیسے پتا چلا؟</a:t>
+              <a:t>WHO YOU ARE MEETING</a:t>
             </a:r>
           </a:p>
         </p:txBody>
@@ -5847,8 +6689,8 @@
         </p:nvSpPr>
         <p:spPr>
           <a:xfrm>
-            <a:off x="822960" y="2286000"/>
-            <a:ext cx="10515600" cy="1097280"/>
+            <a:off x="777240" y="960120"/>
+            <a:ext cx="7680960" cy="822960"/>
           </a:xfrm>
           <a:prstGeom prst="rect">
             <a:avLst/>
@@ -5861,20 +6703,19 @@
           </a:bodyPr>
           <a:lstStyle/>
           <a:p>
-            <a:pPr algn="r" rtl="1">
+            <a:pPr algn="l">
               <a:lnSpc>
                 <a:spcPct val="100000"/>
               </a:lnSpc>
             </a:pPr>
             <a:r>
-              <a:rPr sz="4000" b="0">
-                <a:solidFill>
-                  <a:srgbClr val="0A322E"/>
+              <a:rPr sz="4000" b="0" i="0">
+                <a:solidFill>
+                  <a:srgbClr val="104A43"/>
                 </a:solidFill>
                 <a:latin typeface="Georgia"/>
-                <a:cs typeface="Traditional Arabic"/>
               </a:rPr>
-              <a:t>لَمَّا اسْتَعْمَلَ الرُّوَاةُ الْكَذِبَ اسْتَعْمَلْنَاهُمُ التَّارِيخَ</a:t>
+              <a:t>Mehmed the Conqueror</a:t>
             </a:r>
           </a:p>
         </p:txBody>
@@ -5887,8 +6728,8 @@
         </p:nvSpPr>
         <p:spPr>
           <a:xfrm>
-            <a:off x="822960" y="3657600"/>
-            <a:ext cx="10515600" cy="822960"/>
+            <a:off x="7863840" y="914400"/>
+            <a:ext cx="3566160" cy="822960"/>
           </a:xfrm>
           <a:prstGeom prst="rect">
             <a:avLst/>
@@ -5903,18 +6744,18 @@
           <a:p>
             <a:pPr algn="r" rtl="1">
               <a:lnSpc>
-                <a:spcPct val="150000"/>
+                <a:spcPct val="190000"/>
               </a:lnSpc>
             </a:pPr>
             <a:r>
-              <a:rPr sz="2400" b="0">
-                <a:solidFill>
-                  <a:srgbClr val="1C2321"/>
-                </a:solidFill>
-                <a:latin typeface="Georgia"/>
-                <a:cs typeface="Jameel Noori Nastaleeq"/>
+              <a:rPr sz="3000" b="0" i="0">
+                <a:solidFill>
+                  <a:srgbClr val="104A43"/>
+                </a:solidFill>
+                <a:latin typeface="Noto Nastaliq Urdu"/>
+                <a:cs typeface="Noto Nastaliq Urdu"/>
               </a:rPr>
-              <a:t>جب راوی جھوٹی روایتیں گھڑنے لگے تو ہم نے اُن کی جانچ کے لیے تاریخ سے کام لیا</a:t>
+              <a:t>سلطان محمد فاتح</a:t>
             </a:r>
           </a:p>
         </p:txBody>
@@ -5927,8 +6768,8 @@
         </p:nvSpPr>
         <p:spPr>
           <a:xfrm>
-            <a:off x="822960" y="4846320"/>
-            <a:ext cx="10515600" cy="457200"/>
+            <a:off x="777240" y="2633472"/>
+            <a:ext cx="10607040" cy="411480"/>
           </a:xfrm>
           <a:prstGeom prst="rect">
             <a:avLst/>
@@ -5941,20 +6782,219 @@
           </a:bodyPr>
           <a:lstStyle/>
           <a:p>
-            <a:pPr algn="r" rtl="1">
+            <a:pPr algn="l">
               <a:lnSpc>
                 <a:spcPct val="100000"/>
               </a:lnSpc>
             </a:pPr>
             <a:r>
-              <a:rPr sz="1600" b="0">
+              <a:rPr sz="1500" b="1" i="0">
+                <a:solidFill>
+                  <a:srgbClr val="5A6862"/>
+                </a:solidFill>
+                <a:latin typeface="Segoe UI"/>
+              </a:rPr>
+              <a:t>COMES BACK IN SESSION 7</a:t>
+            </a:r>
+          </a:p>
+        </p:txBody>
+      </p:sp>
+      <p:sp>
+        <p:nvSpPr>
+          <p:cNvPr id="7" name="TextBox 6"/>
+          <p:cNvSpPr txBox="1"/>
+          <p:nvPr/>
+        </p:nvSpPr>
+        <p:spPr>
+          <a:xfrm>
+            <a:off x="777240" y="3108960"/>
+            <a:ext cx="10607040" cy="1188720"/>
+          </a:xfrm>
+          <a:prstGeom prst="rect">
+            <a:avLst/>
+          </a:prstGeom>
+          <a:noFill/>
+        </p:spPr>
+        <p:txBody>
+          <a:bodyPr wrap="square">
+            <a:spAutoFit/>
+          </a:bodyPr>
+          <a:lstStyle/>
+          <a:p>
+            <a:pPr algn="l">
+              <a:lnSpc>
+                <a:spcPct val="130000"/>
+              </a:lnSpc>
+            </a:pPr>
+            <a:r>
+              <a:rPr sz="2200" b="0" i="0">
+                <a:solidFill>
+                  <a:srgbClr val="1C2321"/>
+                </a:solidFill>
+                <a:latin typeface="Georgia"/>
+              </a:rPr>
+              <a:t>Took Constantinople in 1453, thirty-nine years before Granada was lost in the west.</a:t>
+            </a:r>
+          </a:p>
+        </p:txBody>
+      </p:sp>
+      <p:sp>
+        <p:nvSpPr>
+          <p:cNvPr id="8" name="Rectangle 7"/>
+          <p:cNvSpPr/>
+          <p:nvPr/>
+        </p:nvSpPr>
+        <p:spPr>
+          <a:xfrm>
+            <a:off x="777240" y="4315968"/>
+            <a:ext cx="1463040" cy="25400"/>
+          </a:xfrm>
+          <a:prstGeom prst="rect">
+            <a:avLst/>
+          </a:prstGeom>
+          <a:solidFill>
+            <a:srgbClr val="C49A45"/>
+          </a:solidFill>
+          <a:ln>
+            <a:noFill/>
+          </a:ln>
+          <a:effectLst/>
+        </p:spPr>
+        <p:style>
+          <a:lnRef idx="1">
+            <a:schemeClr val="accent1"/>
+          </a:lnRef>
+          <a:fillRef idx="3">
+            <a:schemeClr val="accent1"/>
+          </a:fillRef>
+          <a:effectRef idx="2">
+            <a:schemeClr val="accent1"/>
+          </a:effectRef>
+          <a:fontRef idx="minor">
+            <a:schemeClr val="lt1"/>
+          </a:fontRef>
+        </p:style>
+        <p:txBody>
+          <a:bodyPr rtlCol="0" anchor="ctr"/>
+          <a:lstStyle/>
+          <a:p>
+            <a:pPr algn="ctr"/>
+          </a:p>
+        </p:txBody>
+      </p:sp>
+      <p:sp>
+        <p:nvSpPr>
+          <p:cNvPr id="9" name="TextBox 8"/>
+          <p:cNvSpPr txBox="1"/>
+          <p:nvPr/>
+        </p:nvSpPr>
+        <p:spPr>
+          <a:xfrm>
+            <a:off x="777240" y="4480560"/>
+            <a:ext cx="3657600" cy="320040"/>
+          </a:xfrm>
+          <a:prstGeom prst="rect">
+            <a:avLst/>
+          </a:prstGeom>
+          <a:noFill/>
+        </p:spPr>
+        <p:txBody>
+          <a:bodyPr wrap="square">
+            <a:spAutoFit/>
+          </a:bodyPr>
+          <a:lstStyle/>
+          <a:p>
+            <a:pPr algn="l">
+              <a:lnSpc>
+                <a:spcPct val="100000"/>
+              </a:lnSpc>
+            </a:pPr>
+            <a:r>
+              <a:rPr sz="1100" b="1" i="0">
+                <a:solidFill>
+                  <a:srgbClr val="5A6862"/>
+                </a:solidFill>
+                <a:latin typeface="Segoe UI"/>
+              </a:rPr>
+              <a:t>ONE INCIDENT</a:t>
+            </a:r>
+          </a:p>
+        </p:txBody>
+      </p:sp>
+      <p:sp>
+        <p:nvSpPr>
+          <p:cNvPr id="10" name="TextBox 9"/>
+          <p:cNvSpPr txBox="1"/>
+          <p:nvPr/>
+        </p:nvSpPr>
+        <p:spPr>
+          <a:xfrm>
+            <a:off x="777240" y="4809744"/>
+            <a:ext cx="10607040" cy="1143000"/>
+          </a:xfrm>
+          <a:prstGeom prst="rect">
+            <a:avLst/>
+          </a:prstGeom>
+          <a:noFill/>
+        </p:spPr>
+        <p:txBody>
+          <a:bodyPr wrap="square">
+            <a:spAutoFit/>
+          </a:bodyPr>
+          <a:lstStyle/>
+          <a:p>
+            <a:pPr algn="l">
+              <a:lnSpc>
+                <a:spcPct val="130000"/>
+              </a:lnSpc>
+            </a:pPr>
+            <a:r>
+              <a:rPr sz="2000" b="0" i="1">
+                <a:solidFill>
+                  <a:srgbClr val="0A322E"/>
+                </a:solidFill>
+                <a:latin typeface="Georgia"/>
+              </a:rPr>
+              <a:t>—</a:t>
+            </a:r>
+          </a:p>
+        </p:txBody>
+      </p:sp>
+      <p:sp>
+        <p:nvSpPr>
+          <p:cNvPr id="11" name="TextBox 10"/>
+          <p:cNvSpPr txBox="1"/>
+          <p:nvPr/>
+        </p:nvSpPr>
+        <p:spPr>
+          <a:xfrm>
+            <a:off x="777240" y="6053328"/>
+            <a:ext cx="10607040" cy="365760"/>
+          </a:xfrm>
+          <a:prstGeom prst="rect">
+            <a:avLst/>
+          </a:prstGeom>
+          <a:noFill/>
+        </p:spPr>
+        <p:txBody>
+          <a:bodyPr wrap="square">
+            <a:spAutoFit/>
+          </a:bodyPr>
+          <a:lstStyle/>
+          <a:p>
+            <a:pPr algn="l">
+              <a:lnSpc>
+                <a:spcPct val="100000"/>
+              </a:lnSpc>
+            </a:pPr>
+            <a:r>
+              <a:rPr sz="1200" b="0" i="0">
                 <a:solidFill>
                   <a:srgbClr val="104A43"/>
                 </a:solidFill>
-                <a:latin typeface="Georgia"/>
-                <a:cs typeface="Jameel Noori Nastaleeq"/>
+                <a:latin typeface="Segoe UI"/>
               </a:rPr>
-              <a:t>سفیان ثوری رحمہ اللہ  ·  تاریخِ امت، مقدمہ، ص۵۷</a:t>
+              <a:t>[SOURCE: no work on the shelf reaches the Ottomans — blocked until a volume arrives]</a:t>
             </a:r>
           </a:p>
         </p:txBody>
@@ -6029,8 +7069,8 @@
         </p:nvSpPr>
         <p:spPr>
           <a:xfrm>
-            <a:off x="822960" y="457200"/>
-            <a:ext cx="7315200" cy="365760"/>
+            <a:off x="777240" y="420624"/>
+            <a:ext cx="8229600" cy="365760"/>
           </a:xfrm>
           <a:prstGeom prst="rect">
             <a:avLst/>
@@ -6049,14 +7089,13 @@
               </a:lnSpc>
             </a:pPr>
             <a:r>
-              <a:rPr sz="1200" b="1">
+              <a:rPr sz="1200" b="1" i="0">
                 <a:solidFill>
                   <a:srgbClr val="104A43"/>
                 </a:solidFill>
                 <a:latin typeface="Segoe UI"/>
-                <a:cs typeface="Jameel Noori Nastaleeq"/>
               </a:rPr>
-              <a:t>آج کی بات</a:t>
+              <a:t>HOW DO WE KNOW ANY OF THIS?</a:t>
             </a:r>
           </a:p>
         </p:txBody>
@@ -6069,8 +7108,8 @@
         </p:nvSpPr>
         <p:spPr>
           <a:xfrm>
-            <a:off x="822960" y="1371600"/>
-            <a:ext cx="10515600" cy="731520"/>
+            <a:off x="777240" y="914400"/>
+            <a:ext cx="10607040" cy="822960"/>
           </a:xfrm>
           <a:prstGeom prst="rect">
             <a:avLst/>
@@ -6083,34 +7122,77 @@
           </a:bodyPr>
           <a:lstStyle/>
           <a:p>
-            <a:pPr algn="r" rtl="1">
+            <a:pPr algn="l">
               <a:lnSpc>
                 <a:spcPct val="100000"/>
               </a:lnSpc>
             </a:pPr>
             <a:r>
-              <a:rPr sz="2600" b="0">
+              <a:rPr sz="3800" b="0" i="0">
                 <a:solidFill>
                   <a:srgbClr val="104A43"/>
                 </a:solidFill>
                 <a:latin typeface="Georgia"/>
-                <a:cs typeface="Jameel Noori Nastaleeq"/>
               </a:rPr>
-              <a:t>مولانا شمس الحق افغانی رحمہ اللہ فرماتے ہیں</a:t>
-            </a:r>
-          </a:p>
-        </p:txBody>
-      </p:sp>
-      <p:sp>
-        <p:nvSpPr>
-          <p:cNvPr id="5" name="TextBox 4"/>
+              <a:t>Two ways of knowing the past</a:t>
+            </a:r>
+          </a:p>
+        </p:txBody>
+      </p:sp>
+      <p:sp>
+        <p:nvSpPr>
+          <p:cNvPr id="5" name="Rectangle 4"/>
+          <p:cNvSpPr/>
+          <p:nvPr/>
+        </p:nvSpPr>
+        <p:spPr>
+          <a:xfrm>
+            <a:off x="777240" y="1965960"/>
+            <a:ext cx="10607040" cy="36576"/>
+          </a:xfrm>
+          <a:prstGeom prst="rect">
+            <a:avLst/>
+          </a:prstGeom>
+          <a:solidFill>
+            <a:srgbClr val="C49A45"/>
+          </a:solidFill>
+          <a:ln>
+            <a:noFill/>
+          </a:ln>
+          <a:effectLst/>
+        </p:spPr>
+        <p:style>
+          <a:lnRef idx="1">
+            <a:schemeClr val="accent1"/>
+          </a:lnRef>
+          <a:fillRef idx="3">
+            <a:schemeClr val="accent1"/>
+          </a:fillRef>
+          <a:effectRef idx="2">
+            <a:schemeClr val="accent1"/>
+          </a:effectRef>
+          <a:fontRef idx="minor">
+            <a:schemeClr val="lt1"/>
+          </a:fontRef>
+        </p:style>
+        <p:txBody>
+          <a:bodyPr rtlCol="0" anchor="ctr"/>
+          <a:lstStyle/>
+          <a:p>
+            <a:pPr algn="ctr"/>
+          </a:p>
+        </p:txBody>
+      </p:sp>
+      <p:sp>
+        <p:nvSpPr>
+          <p:cNvPr id="6" name="TextBox 5"/>
           <p:cNvSpPr txBox="1"/>
           <p:nvPr/>
         </p:nvSpPr>
         <p:spPr>
           <a:xfrm>
-            <a:off x="822960" y="2286000"/>
-            <a:ext cx="10515600" cy="2560320"/>
+            <a:off x="777240" y="2286000"/>
+            <a:ext cx="4937760" cy="548640"/>
           </a:xfrm>
           <a:prstGeom prst="rect">
             <a:avLst/>
@@ -6123,111 +7205,271 @@
           </a:bodyPr>
           <a:lstStyle/>
           <a:p>
-            <a:pPr algn="r" rtl="1">
-              <a:lnSpc>
-                <a:spcPct val="170000"/>
-              </a:lnSpc>
-            </a:pPr>
-            <a:r>
-              <a:rPr sz="3400" b="0">
-                <a:solidFill>
-                  <a:srgbClr val="1C2321"/>
-                </a:solidFill>
-                <a:latin typeface="Georgia"/>
-                <a:cs typeface="Jameel Noori Nastaleeq"/>
-              </a:rPr>
-              <a:t>ماضی سے ارتباط</a:t>
-            </a:r>
-          </a:p>
-          <a:p>
-            <a:pPr algn="r" rtl="1">
-              <a:lnSpc>
-                <a:spcPct val="170000"/>
-              </a:lnSpc>
-            </a:pPr>
-            <a:r>
-              <a:rPr sz="3400" b="0">
-                <a:solidFill>
-                  <a:srgbClr val="1C2321"/>
-                </a:solidFill>
-                <a:latin typeface="Georgia"/>
-                <a:cs typeface="Jameel Noori Nastaleeq"/>
-              </a:rPr>
-              <a:t>وحدتِ فکر و عمل</a:t>
-            </a:r>
-          </a:p>
-          <a:p>
-            <a:pPr algn="r" rtl="1">
-              <a:lnSpc>
-                <a:spcPct val="170000"/>
-              </a:lnSpc>
-            </a:pPr>
-            <a:r>
-              <a:rPr sz="3400" b="0">
-                <a:solidFill>
-                  <a:srgbClr val="1C2321"/>
-                </a:solidFill>
-                <a:latin typeface="Georgia"/>
-                <a:cs typeface="Jameel Noori Nastaleeq"/>
-              </a:rPr>
-              <a:t>فراہمیِ اسبابِ قوت</a:t>
-            </a:r>
-          </a:p>
-          <a:p>
-            <a:pPr algn="r" rtl="1">
-              <a:lnSpc>
-                <a:spcPct val="170000"/>
-              </a:lnSpc>
-            </a:pPr>
-            <a:r>
-              <a:rPr sz="3400" b="0">
-                <a:solidFill>
-                  <a:srgbClr val="1C2321"/>
-                </a:solidFill>
-                <a:latin typeface="Georgia"/>
-                <a:cs typeface="Jameel Noori Nastaleeq"/>
-              </a:rPr>
-              <a:t>جہدِ مسلسل</a:t>
-            </a:r>
-          </a:p>
-        </p:txBody>
-      </p:sp>
-      <p:sp>
-        <p:nvSpPr>
-          <p:cNvPr id="6" name="TextBox 5"/>
-          <p:cNvSpPr txBox="1"/>
-          <p:nvPr/>
-        </p:nvSpPr>
-        <p:spPr>
-          <a:xfrm>
-            <a:off x="822960" y="5120640"/>
-            <a:ext cx="10515600" cy="457200"/>
-          </a:xfrm>
-          <a:prstGeom prst="rect">
-            <a:avLst/>
-          </a:prstGeom>
-          <a:noFill/>
-        </p:spPr>
-        <p:txBody>
-          <a:bodyPr wrap="square">
-            <a:spAutoFit/>
-          </a:bodyPr>
-          <a:lstStyle/>
-          <a:p>
-            <a:pPr algn="r" rtl="1">
+            <a:pPr algn="l">
               <a:lnSpc>
                 <a:spcPct val="100000"/>
               </a:lnSpc>
             </a:pPr>
             <a:r>
-              <a:rPr sz="1600" b="0">
+              <a:rPr sz="2500" b="0" i="0">
+                <a:solidFill>
+                  <a:srgbClr val="5A6862"/>
+                </a:solidFill>
+                <a:latin typeface="Georgia"/>
+              </a:rPr>
+              <a:t>The modern method</a:t>
+            </a:r>
+          </a:p>
+        </p:txBody>
+      </p:sp>
+      <p:sp>
+        <p:nvSpPr>
+          <p:cNvPr id="7" name="TextBox 6"/>
+          <p:cNvSpPr txBox="1"/>
+          <p:nvPr/>
+        </p:nvSpPr>
+        <p:spPr>
+          <a:xfrm>
+            <a:off x="777240" y="2971800"/>
+            <a:ext cx="4937760" cy="2194560"/>
+          </a:xfrm>
+          <a:prstGeom prst="rect">
+            <a:avLst/>
+          </a:prstGeom>
+          <a:noFill/>
+        </p:spPr>
+        <p:txBody>
+          <a:bodyPr wrap="square">
+            <a:spAutoFit/>
+          </a:bodyPr>
+          <a:lstStyle/>
+          <a:p>
+            <a:pPr algn="l">
+              <a:lnSpc>
+                <a:spcPct val="145000"/>
+              </a:lnSpc>
+            </a:pPr>
+            <a:r>
+              <a:rPr sz="2100" b="0" i="0">
+                <a:solidFill>
+                  <a:srgbClr val="5A6862"/>
+                </a:solidFill>
+                <a:latin typeface="Georgia"/>
+              </a:rPr>
+              <a:t>Dig, infer, connect the dots.</a:t>
+            </a:r>
+          </a:p>
+          <a:p>
+            <a:pPr algn="l">
+              <a:lnSpc>
+                <a:spcPct val="145000"/>
+              </a:lnSpc>
+            </a:pPr>
+            <a:r>
+              <a:rPr sz="2100" b="0" i="0">
+                <a:solidFill>
+                  <a:srgbClr val="5A6862"/>
+                </a:solidFill>
+                <a:latin typeface="Georgia"/>
+              </a:rPr>
+              <a:t>No chain of transmission.</a:t>
+            </a:r>
+          </a:p>
+          <a:p>
+            <a:pPr algn="l">
+              <a:lnSpc>
+                <a:spcPct val="145000"/>
+              </a:lnSpc>
+            </a:pPr>
+            <a:r>
+              <a:rPr sz="2100" b="0" i="0">
+                <a:solidFill>
+                  <a:srgbClr val="5A6862"/>
+                </a:solidFill>
+                <a:latin typeface="Georgia"/>
+              </a:rPr>
+              <a:t>No rule for accepting or</a:t>
+            </a:r>
+          </a:p>
+          <a:p>
+            <a:pPr algn="l">
+              <a:lnSpc>
+                <a:spcPct val="145000"/>
+              </a:lnSpc>
+            </a:pPr>
+            <a:r>
+              <a:rPr sz="2100" b="0" i="0">
+                <a:solidFill>
+                  <a:srgbClr val="5A6862"/>
+                </a:solidFill>
+                <a:latin typeface="Georgia"/>
+              </a:rPr>
+              <a:t>rejecting a report.</a:t>
+            </a:r>
+          </a:p>
+        </p:txBody>
+      </p:sp>
+      <p:sp>
+        <p:nvSpPr>
+          <p:cNvPr id="8" name="TextBox 7"/>
+          <p:cNvSpPr txBox="1"/>
+          <p:nvPr/>
+        </p:nvSpPr>
+        <p:spPr>
+          <a:xfrm>
+            <a:off x="6492240" y="2286000"/>
+            <a:ext cx="4937760" cy="548640"/>
+          </a:xfrm>
+          <a:prstGeom prst="rect">
+            <a:avLst/>
+          </a:prstGeom>
+          <a:noFill/>
+        </p:spPr>
+        <p:txBody>
+          <a:bodyPr wrap="square">
+            <a:spAutoFit/>
+          </a:bodyPr>
+          <a:lstStyle/>
+          <a:p>
+            <a:pPr algn="l">
+              <a:lnSpc>
+                <a:spcPct val="100000"/>
+              </a:lnSpc>
+            </a:pPr>
+            <a:r>
+              <a:rPr sz="2500" b="0" i="0">
                 <a:solidFill>
                   <a:srgbClr val="104A43"/>
                 </a:solidFill>
                 <a:latin typeface="Georgia"/>
-                <a:cs typeface="Jameel Noori Nastaleeq"/>
               </a:rPr>
-              <a:t>تاریخِ امت، مقدمہ، ص۵۳</a:t>
+              <a:t>The Islamic method</a:t>
+            </a:r>
+          </a:p>
+        </p:txBody>
+      </p:sp>
+      <p:sp>
+        <p:nvSpPr>
+          <p:cNvPr id="9" name="TextBox 8"/>
+          <p:cNvSpPr txBox="1"/>
+          <p:nvPr/>
+        </p:nvSpPr>
+        <p:spPr>
+          <a:xfrm>
+            <a:off x="6492240" y="2971800"/>
+            <a:ext cx="4937760" cy="2194560"/>
+          </a:xfrm>
+          <a:prstGeom prst="rect">
+            <a:avLst/>
+          </a:prstGeom>
+          <a:noFill/>
+        </p:spPr>
+        <p:txBody>
+          <a:bodyPr wrap="square">
+            <a:spAutoFit/>
+          </a:bodyPr>
+          <a:lstStyle/>
+          <a:p>
+            <a:pPr algn="l">
+              <a:lnSpc>
+                <a:spcPct val="145000"/>
+              </a:lnSpc>
+            </a:pPr>
+            <a:r>
+              <a:rPr sz="2100" b="0" i="0">
+                <a:solidFill>
+                  <a:srgbClr val="0A322E"/>
+                </a:solidFill>
+                <a:latin typeface="Georgia"/>
+              </a:rPr>
+              <a:t>Every report carries a chain</a:t>
+            </a:r>
+          </a:p>
+          <a:p>
+            <a:pPr algn="l">
+              <a:lnSpc>
+                <a:spcPct val="145000"/>
+              </a:lnSpc>
+            </a:pPr>
+            <a:r>
+              <a:rPr sz="2100" b="0" i="0">
+                <a:solidFill>
+                  <a:srgbClr val="0A322E"/>
+                </a:solidFill>
+                <a:latin typeface="Georgia"/>
+              </a:rPr>
+              <a:t>back to an eyewitness — and</a:t>
+            </a:r>
+          </a:p>
+          <a:p>
+            <a:pPr algn="l">
+              <a:lnSpc>
+                <a:spcPct val="145000"/>
+              </a:lnSpc>
+            </a:pPr>
+            <a:r>
+              <a:rPr sz="2100" b="0" i="0">
+                <a:solidFill>
+                  <a:srgbClr val="0A322E"/>
+                </a:solidFill>
+                <a:latin typeface="Georgia"/>
+              </a:rPr>
+              <a:t>every narrator in that chain</a:t>
+            </a:r>
+          </a:p>
+          <a:p>
+            <a:pPr algn="l">
+              <a:lnSpc>
+                <a:spcPct val="145000"/>
+              </a:lnSpc>
+            </a:pPr>
+            <a:r>
+              <a:rPr sz="2100" b="0" i="0">
+                <a:solidFill>
+                  <a:srgbClr val="0A322E"/>
+                </a:solidFill>
+                <a:latin typeface="Georgia"/>
+              </a:rPr>
+              <a:t>has a documented life.</a:t>
+            </a:r>
+          </a:p>
+        </p:txBody>
+      </p:sp>
+      <p:sp>
+        <p:nvSpPr>
+          <p:cNvPr id="10" name="TextBox 9"/>
+          <p:cNvSpPr txBox="1"/>
+          <p:nvPr/>
+        </p:nvSpPr>
+        <p:spPr>
+          <a:xfrm>
+            <a:off x="777240" y="5349240"/>
+            <a:ext cx="10607040" cy="548640"/>
+          </a:xfrm>
+          <a:prstGeom prst="rect">
+            <a:avLst/>
+          </a:prstGeom>
+          <a:noFill/>
+        </p:spPr>
+        <p:txBody>
+          <a:bodyPr wrap="square">
+            <a:spAutoFit/>
+          </a:bodyPr>
+          <a:lstStyle/>
+          <a:p>
+            <a:pPr algn="l">
+              <a:lnSpc>
+                <a:spcPct val="100000"/>
+              </a:lnSpc>
+            </a:pPr>
+            <a:r>
+              <a:rPr sz="1900" b="0" i="1">
+                <a:solidFill>
+                  <a:srgbClr val="7A2E2E"/>
+                </a:solidFill>
+                <a:latin typeface="Georgia"/>
+              </a:rPr>
+              <a:t>So when you hear “there is no historical basis for that” — ask which method is speaking.</a:t>
             </a:r>
           </a:p>
         </p:txBody>
@@ -6265,7 +7507,7 @@
             <a:avLst/>
           </a:prstGeom>
           <a:solidFill>
-            <a:srgbClr val="0A322E"/>
+            <a:srgbClr val="FAF7F0"/>
           </a:solidFill>
           <a:ln>
             <a:noFill/>
@@ -6302,8 +7544,8 @@
         </p:nvSpPr>
         <p:spPr>
           <a:xfrm>
-            <a:off x="822960" y="2194560"/>
-            <a:ext cx="10515600" cy="1188720"/>
+            <a:off x="777240" y="420624"/>
+            <a:ext cx="8229600" cy="365760"/>
           </a:xfrm>
           <a:prstGeom prst="rect">
             <a:avLst/>
@@ -6316,80 +7558,158 @@
           </a:bodyPr>
           <a:lstStyle/>
           <a:p>
-            <a:pPr algn="r" rtl="1">
-              <a:lnSpc>
-                <a:spcPct val="160000"/>
-              </a:lnSpc>
-            </a:pPr>
-            <a:r>
-              <a:rPr sz="5000" b="0">
-                <a:solidFill>
-                  <a:srgbClr val="FAF7F0"/>
-                </a:solidFill>
-                <a:latin typeface="Georgia"/>
-                <a:cs typeface="Jameel Noori Nastaleeq"/>
-              </a:rPr>
-              <a:t>اگلے ہفتے — بارہ سال</a:t>
-            </a:r>
-          </a:p>
-        </p:txBody>
-      </p:sp>
-      <p:sp>
-        <p:nvSpPr>
-          <p:cNvPr id="4" name="TextBox 3"/>
-          <p:cNvSpPr txBox="1"/>
-          <p:nvPr/>
-        </p:nvSpPr>
-        <p:spPr>
-          <a:xfrm>
-            <a:off x="822960" y="3566160"/>
-            <a:ext cx="10515600" cy="731520"/>
-          </a:xfrm>
-          <a:prstGeom prst="rect">
-            <a:avLst/>
-          </a:prstGeom>
-          <a:noFill/>
-        </p:spPr>
-        <p:txBody>
-          <a:bodyPr wrap="square">
-            <a:spAutoFit/>
-          </a:bodyPr>
-          <a:lstStyle/>
-          <a:p>
-            <a:pPr algn="r" rtl="1">
+            <a:pPr algn="l">
               <a:lnSpc>
                 <a:spcPct val="100000"/>
               </a:lnSpc>
             </a:pPr>
             <a:r>
-              <a:rPr sz="3000" b="0">
-                <a:solidFill>
-                  <a:srgbClr val="C49A45"/>
+              <a:rPr sz="1200" b="1" i="0">
+                <a:solidFill>
+                  <a:srgbClr val="104A43"/>
+                </a:solidFill>
+                <a:latin typeface="Segoe UI"/>
+              </a:rPr>
+              <a:t>HOW A FORGERY DIES</a:t>
+            </a:r>
+          </a:p>
+        </p:txBody>
+      </p:sp>
+      <p:sp>
+        <p:nvSpPr>
+          <p:cNvPr id="4" name="TextBox 3"/>
+          <p:cNvSpPr txBox="1"/>
+          <p:nvPr/>
+        </p:nvSpPr>
+        <p:spPr>
+          <a:xfrm>
+            <a:off x="640080" y="1325880"/>
+            <a:ext cx="10881360" cy="1554480"/>
+          </a:xfrm>
+          <a:prstGeom prst="rect">
+            <a:avLst/>
+          </a:prstGeom>
+          <a:noFill/>
+        </p:spPr>
+        <p:txBody>
+          <a:bodyPr wrap="square">
+            <a:spAutoFit/>
+          </a:bodyPr>
+          <a:lstStyle/>
+          <a:p>
+            <a:pPr algn="r" rtl="1">
+              <a:lnSpc>
+                <a:spcPct val="140000"/>
+              </a:lnSpc>
+            </a:pPr>
+            <a:r>
+              <a:rPr sz="3600" b="0" i="0">
+                <a:solidFill>
+                  <a:srgbClr val="0A322E"/>
+                </a:solidFill>
+                <a:latin typeface="Traditional Arabic"/>
+                <a:cs typeface="Traditional Arabic"/>
+              </a:rPr>
+              <a:t>لَمَّا اسْتَعْمَلَ الرُّوَاةُ الْكَذِبَ اسْتَعْمَلْنَاهُمُ التَّارِيخَ</a:t>
+            </a:r>
+          </a:p>
+        </p:txBody>
+      </p:sp>
+      <p:sp>
+        <p:nvSpPr>
+          <p:cNvPr id="5" name="TextBox 4"/>
+          <p:cNvSpPr txBox="1"/>
+          <p:nvPr/>
+        </p:nvSpPr>
+        <p:spPr>
+          <a:xfrm>
+            <a:off x="1188720" y="3017520"/>
+            <a:ext cx="9784080" cy="1371600"/>
+          </a:xfrm>
+          <a:prstGeom prst="rect">
+            <a:avLst/>
+          </a:prstGeom>
+          <a:noFill/>
+        </p:spPr>
+        <p:txBody>
+          <a:bodyPr wrap="square">
+            <a:spAutoFit/>
+          </a:bodyPr>
+          <a:lstStyle/>
+          <a:p>
+            <a:pPr algn="ctr">
+              <a:lnSpc>
+                <a:spcPct val="135000"/>
+              </a:lnSpc>
+            </a:pPr>
+            <a:r>
+              <a:rPr sz="2500" b="0" i="1">
+                <a:solidFill>
+                  <a:srgbClr val="1C2321"/>
                 </a:solidFill>
                 <a:latin typeface="Georgia"/>
-                <a:cs typeface="Jameel Noori Nastaleeq"/>
               </a:rPr>
-              <a:t>۱۱ھ  ←  ۲۳ھ</a:t>
-            </a:r>
-          </a:p>
-        </p:txBody>
-      </p:sp>
-      <p:sp>
-        <p:nvSpPr>
-          <p:cNvPr id="5" name="Rectangle 4"/>
+              <a:t>“When narrators began inventing, we used dates against them.”</a:t>
+            </a:r>
+          </a:p>
+        </p:txBody>
+      </p:sp>
+      <p:sp>
+        <p:nvSpPr>
+          <p:cNvPr id="6" name="TextBox 5"/>
+          <p:cNvSpPr txBox="1"/>
+          <p:nvPr/>
+        </p:nvSpPr>
+        <p:spPr>
+          <a:xfrm>
+            <a:off x="914400" y="4389120"/>
+            <a:ext cx="10332720" cy="914400"/>
+          </a:xfrm>
+          <a:prstGeom prst="rect">
+            <a:avLst/>
+          </a:prstGeom>
+          <a:noFill/>
+        </p:spPr>
+        <p:txBody>
+          <a:bodyPr wrap="square">
+            <a:spAutoFit/>
+          </a:bodyPr>
+          <a:lstStyle/>
+          <a:p>
+            <a:pPr algn="r" rtl="1">
+              <a:lnSpc>
+                <a:spcPct val="190000"/>
+              </a:lnSpc>
+            </a:pPr>
+            <a:r>
+              <a:rPr sz="2400" b="0" i="0">
+                <a:solidFill>
+                  <a:srgbClr val="5A6862"/>
+                </a:solidFill>
+                <a:latin typeface="Noto Nastaliq Urdu"/>
+                <a:cs typeface="Noto Nastaliq Urdu"/>
+              </a:rPr>
+              <a:t>جب راوی جھوٹی روایتیں گھڑنے لگے تو ہم نے تاریخ سے کام لیا</a:t>
+            </a:r>
+          </a:p>
+        </p:txBody>
+      </p:sp>
+      <p:sp>
+        <p:nvSpPr>
+          <p:cNvPr id="7" name="Rectangle 6"/>
           <p:cNvSpPr/>
           <p:nvPr/>
         </p:nvSpPr>
         <p:spPr>
           <a:xfrm>
-            <a:off x="822960" y="4572000"/>
-            <a:ext cx="10515600" cy="12700"/>
+            <a:off x="5394960" y="5458968"/>
+            <a:ext cx="1371600" cy="19050"/>
           </a:xfrm>
           <a:prstGeom prst="rect">
             <a:avLst/>
           </a:prstGeom>
           <a:solidFill>
-            <a:srgbClr val="FAF7F0"/>
+            <a:srgbClr val="C49A45"/>
           </a:solidFill>
           <a:ln>
             <a:noFill/>
@@ -6420,14 +7740,14 @@
       </p:sp>
       <p:sp>
         <p:nvSpPr>
-          <p:cNvPr id="6" name="TextBox 5"/>
+          <p:cNvPr id="8" name="TextBox 7"/>
           <p:cNvSpPr txBox="1"/>
           <p:nvPr/>
         </p:nvSpPr>
         <p:spPr>
           <a:xfrm>
-            <a:off x="822960" y="4846320"/>
-            <a:ext cx="10515600" cy="822960"/>
+            <a:off x="640080" y="5623559"/>
+            <a:ext cx="10881360" cy="457200"/>
           </a:xfrm>
           <a:prstGeom prst="rect">
             <a:avLst/>
@@ -6440,20 +7760,19 @@
           </a:bodyPr>
           <a:lstStyle/>
           <a:p>
-            <a:pPr algn="r" rtl="1">
+            <a:pPr algn="ctr">
               <a:lnSpc>
                 <a:spcPct val="100000"/>
               </a:lnSpc>
             </a:pPr>
             <a:r>
-              <a:rPr sz="2600" b="0">
-                <a:solidFill>
-                  <a:srgbClr val="C49A45"/>
-                </a:solidFill>
-                <a:latin typeface="Georgia"/>
-                <a:cs typeface="Jameel Noori Nastaleeq"/>
+              <a:rPr sz="1400" b="0" i="0">
+                <a:solidFill>
+                  <a:srgbClr val="104A43"/>
+                </a:solidFill>
+                <a:latin typeface="Segoe UI"/>
               </a:rPr>
-              <a:t>کوئی تاریخ کی بات کہے — تو اب آپ سب سے پہلے کیا پوچھیں گے؟</a:t>
+              <a:t>SUFYAN AL-THAWRI  ·  TAREEKH-E-UMMAT, MUQADDIMA, p.57</a:t>
             </a:r>
           </a:p>
         </p:txBody>
@@ -6528,8 +7847,8 @@
         </p:nvSpPr>
         <p:spPr>
           <a:xfrm>
-            <a:off x="822960" y="457200"/>
-            <a:ext cx="7315200" cy="365760"/>
+            <a:off x="777240" y="420624"/>
+            <a:ext cx="8229600" cy="365760"/>
           </a:xfrm>
           <a:prstGeom prst="rect">
             <a:avLst/>
@@ -6548,14 +7867,13 @@
               </a:lnSpc>
             </a:pPr>
             <a:r>
-              <a:rPr sz="1200" b="1">
+              <a:rPr sz="1200" b="1" i="0">
                 <a:solidFill>
                   <a:srgbClr val="104A43"/>
                 </a:solidFill>
                 <a:latin typeface="Segoe UI"/>
-                <a:cs typeface="Jameel Noori Nastaleeq"/>
               </a:rPr>
-              <a:t>SOURCES  ·  show only if asked</a:t>
+              <a:t>آج کی بات  ·  TODAY'S POINT — NOT MINE</a:t>
             </a:r>
           </a:p>
         </p:txBody>
@@ -6568,8 +7886,8 @@
         </p:nvSpPr>
         <p:spPr>
           <a:xfrm>
-            <a:off x="822960" y="2011680"/>
-            <a:ext cx="10515600" cy="2743200"/>
+            <a:off x="777240" y="960120"/>
+            <a:ext cx="6858000" cy="640080"/>
           </a:xfrm>
           <a:prstGeom prst="rect">
             <a:avLst/>
@@ -6582,71 +7900,1055 @@
           </a:bodyPr>
           <a:lstStyle/>
           <a:p>
+            <a:pPr algn="l">
+              <a:lnSpc>
+                <a:spcPct val="100000"/>
+              </a:lnSpc>
+            </a:pPr>
+            <a:r>
+              <a:rPr sz="3000" b="0" i="0">
+                <a:solidFill>
+                  <a:srgbClr val="104A43"/>
+                </a:solidFill>
+                <a:latin typeface="Georgia"/>
+              </a:rPr>
+              <a:t>Shams-ul-Haq Afghani</a:t>
+            </a:r>
+          </a:p>
+        </p:txBody>
+      </p:sp>
+      <p:sp>
+        <p:nvSpPr>
+          <p:cNvPr id="5" name="TextBox 4"/>
+          <p:cNvSpPr txBox="1"/>
+          <p:nvPr/>
+        </p:nvSpPr>
+        <p:spPr>
+          <a:xfrm>
+            <a:off x="6949440" y="914400"/>
+            <a:ext cx="4480560" cy="640080"/>
+          </a:xfrm>
+          <a:prstGeom prst="rect">
+            <a:avLst/>
+          </a:prstGeom>
+          <a:noFill/>
+        </p:spPr>
+        <p:txBody>
+          <a:bodyPr wrap="square">
+            <a:spAutoFit/>
+          </a:bodyPr>
+          <a:lstStyle/>
+          <a:p>
             <a:pPr algn="r" rtl="1">
+              <a:lnSpc>
+                <a:spcPct val="190000"/>
+              </a:lnSpc>
+            </a:pPr>
+            <a:r>
+              <a:rPr sz="2400" b="0" i="0">
+                <a:solidFill>
+                  <a:srgbClr val="104A43"/>
+                </a:solidFill>
+                <a:latin typeface="Noto Nastaliq Urdu"/>
+                <a:cs typeface="Noto Nastaliq Urdu"/>
+              </a:rPr>
+              <a:t>مولانا شمس الحق افغانی رحمہ اللہ</a:t>
+            </a:r>
+          </a:p>
+        </p:txBody>
+      </p:sp>
+      <p:sp>
+        <p:nvSpPr>
+          <p:cNvPr id="6" name="TextBox 5"/>
+          <p:cNvSpPr txBox="1"/>
+          <p:nvPr/>
+        </p:nvSpPr>
+        <p:spPr>
+          <a:xfrm>
+            <a:off x="777240" y="1783080"/>
+            <a:ext cx="10607040" cy="457200"/>
+          </a:xfrm>
+          <a:prstGeom prst="rect">
+            <a:avLst/>
+          </a:prstGeom>
+          <a:noFill/>
+        </p:spPr>
+        <p:txBody>
+          <a:bodyPr wrap="square">
+            <a:spAutoFit/>
+          </a:bodyPr>
+          <a:lstStyle/>
+          <a:p>
+            <a:pPr algn="l">
+              <a:lnSpc>
+                <a:spcPct val="100000"/>
+              </a:lnSpc>
+            </a:pPr>
+            <a:r>
+              <a:rPr sz="2000" b="0" i="1">
+                <a:solidFill>
+                  <a:srgbClr val="5A6862"/>
+                </a:solidFill>
+                <a:latin typeface="Georgia"/>
+              </a:rPr>
+              <a:t>Four things a people needs in order to rise —</a:t>
+            </a:r>
+          </a:p>
+        </p:txBody>
+      </p:sp>
+      <p:sp>
+        <p:nvSpPr>
+          <p:cNvPr id="7" name="TextBox 6"/>
+          <p:cNvSpPr txBox="1"/>
+          <p:nvPr/>
+        </p:nvSpPr>
+        <p:spPr>
+          <a:xfrm>
+            <a:off x="822960" y="2331720"/>
+            <a:ext cx="457200" cy="548640"/>
+          </a:xfrm>
+          <a:prstGeom prst="rect">
+            <a:avLst/>
+          </a:prstGeom>
+          <a:noFill/>
+        </p:spPr>
+        <p:txBody>
+          <a:bodyPr wrap="square">
+            <a:spAutoFit/>
+          </a:bodyPr>
+          <a:lstStyle/>
+          <a:p>
+            <a:pPr algn="l">
+              <a:lnSpc>
+                <a:spcPct val="100000"/>
+              </a:lnSpc>
+            </a:pPr>
+            <a:r>
+              <a:rPr sz="2200" b="1" i="0">
+                <a:solidFill>
+                  <a:srgbClr val="C49A45"/>
+                </a:solidFill>
+                <a:latin typeface="Segoe UI"/>
+              </a:rPr>
+              <a:t>1</a:t>
+            </a:r>
+          </a:p>
+        </p:txBody>
+      </p:sp>
+      <p:sp>
+        <p:nvSpPr>
+          <p:cNvPr id="8" name="TextBox 7"/>
+          <p:cNvSpPr txBox="1"/>
+          <p:nvPr/>
+        </p:nvSpPr>
+        <p:spPr>
+          <a:xfrm>
+            <a:off x="1371600" y="2331720"/>
+            <a:ext cx="5669280" cy="548640"/>
+          </a:xfrm>
+          <a:prstGeom prst="rect">
+            <a:avLst/>
+          </a:prstGeom>
+          <a:noFill/>
+        </p:spPr>
+        <p:txBody>
+          <a:bodyPr wrap="square">
+            <a:spAutoFit/>
+          </a:bodyPr>
+          <a:lstStyle/>
+          <a:p>
+            <a:pPr algn="l">
+              <a:lnSpc>
+                <a:spcPct val="100000"/>
+              </a:lnSpc>
+            </a:pPr>
+            <a:r>
+              <a:rPr sz="2500" b="1" i="0">
+                <a:solidFill>
+                  <a:srgbClr val="0A322E"/>
+                </a:solidFill>
+                <a:latin typeface="Georgia"/>
+              </a:rPr>
+              <a:t>Connection to its own past</a:t>
+            </a:r>
+          </a:p>
+        </p:txBody>
+      </p:sp>
+      <p:sp>
+        <p:nvSpPr>
+          <p:cNvPr id="9" name="TextBox 8"/>
+          <p:cNvSpPr txBox="1"/>
+          <p:nvPr/>
+        </p:nvSpPr>
+        <p:spPr>
+          <a:xfrm>
+            <a:off x="7132320" y="2276856"/>
+            <a:ext cx="4297680" cy="640080"/>
+          </a:xfrm>
+          <a:prstGeom prst="rect">
+            <a:avLst/>
+          </a:prstGeom>
+          <a:noFill/>
+        </p:spPr>
+        <p:txBody>
+          <a:bodyPr wrap="square">
+            <a:spAutoFit/>
+          </a:bodyPr>
+          <a:lstStyle/>
+          <a:p>
+            <a:pPr algn="r" rtl="1">
+              <a:lnSpc>
+                <a:spcPct val="180000"/>
+              </a:lnSpc>
+            </a:pPr>
+            <a:r>
+              <a:rPr sz="2200" b="0" i="0">
+                <a:solidFill>
+                  <a:srgbClr val="0A322E"/>
+                </a:solidFill>
+                <a:latin typeface="Noto Nastaliq Urdu"/>
+                <a:cs typeface="Noto Nastaliq Urdu"/>
+              </a:rPr>
+              <a:t>ماضی سے ارتباط</a:t>
+            </a:r>
+          </a:p>
+        </p:txBody>
+      </p:sp>
+      <p:sp>
+        <p:nvSpPr>
+          <p:cNvPr id="10" name="TextBox 9"/>
+          <p:cNvSpPr txBox="1"/>
+          <p:nvPr/>
+        </p:nvSpPr>
+        <p:spPr>
+          <a:xfrm>
+            <a:off x="822960" y="3044952"/>
+            <a:ext cx="457200" cy="548640"/>
+          </a:xfrm>
+          <a:prstGeom prst="rect">
+            <a:avLst/>
+          </a:prstGeom>
+          <a:noFill/>
+        </p:spPr>
+        <p:txBody>
+          <a:bodyPr wrap="square">
+            <a:spAutoFit/>
+          </a:bodyPr>
+          <a:lstStyle/>
+          <a:p>
+            <a:pPr algn="l">
+              <a:lnSpc>
+                <a:spcPct val="100000"/>
+              </a:lnSpc>
+            </a:pPr>
+            <a:r>
+              <a:rPr sz="2200" b="1" i="0">
+                <a:solidFill>
+                  <a:srgbClr val="C49A45"/>
+                </a:solidFill>
+                <a:latin typeface="Segoe UI"/>
+              </a:rPr>
+              <a:t>2</a:t>
+            </a:r>
+          </a:p>
+        </p:txBody>
+      </p:sp>
+      <p:sp>
+        <p:nvSpPr>
+          <p:cNvPr id="11" name="TextBox 10"/>
+          <p:cNvSpPr txBox="1"/>
+          <p:nvPr/>
+        </p:nvSpPr>
+        <p:spPr>
+          <a:xfrm>
+            <a:off x="1371600" y="3044952"/>
+            <a:ext cx="5669280" cy="548640"/>
+          </a:xfrm>
+          <a:prstGeom prst="rect">
+            <a:avLst/>
+          </a:prstGeom>
+          <a:noFill/>
+        </p:spPr>
+        <p:txBody>
+          <a:bodyPr wrap="square">
+            <a:spAutoFit/>
+          </a:bodyPr>
+          <a:lstStyle/>
+          <a:p>
+            <a:pPr algn="l">
+              <a:lnSpc>
+                <a:spcPct val="100000"/>
+              </a:lnSpc>
+            </a:pPr>
+            <a:r>
+              <a:rPr sz="2500" b="0" i="0">
+                <a:solidFill>
+                  <a:srgbClr val="1C2321"/>
+                </a:solidFill>
+                <a:latin typeface="Georgia"/>
+              </a:rPr>
+              <a:t>Unity of thought and action</a:t>
+            </a:r>
+          </a:p>
+        </p:txBody>
+      </p:sp>
+      <p:sp>
+        <p:nvSpPr>
+          <p:cNvPr id="12" name="TextBox 11"/>
+          <p:cNvSpPr txBox="1"/>
+          <p:nvPr/>
+        </p:nvSpPr>
+        <p:spPr>
+          <a:xfrm>
+            <a:off x="7132320" y="2990088"/>
+            <a:ext cx="4297680" cy="640080"/>
+          </a:xfrm>
+          <a:prstGeom prst="rect">
+            <a:avLst/>
+          </a:prstGeom>
+          <a:noFill/>
+        </p:spPr>
+        <p:txBody>
+          <a:bodyPr wrap="square">
+            <a:spAutoFit/>
+          </a:bodyPr>
+          <a:lstStyle/>
+          <a:p>
+            <a:pPr algn="r" rtl="1">
+              <a:lnSpc>
+                <a:spcPct val="180000"/>
+              </a:lnSpc>
+            </a:pPr>
+            <a:r>
+              <a:rPr sz="2200" b="0" i="0">
+                <a:solidFill>
+                  <a:srgbClr val="5A6862"/>
+                </a:solidFill>
+                <a:latin typeface="Noto Nastaliq Urdu"/>
+                <a:cs typeface="Noto Nastaliq Urdu"/>
+              </a:rPr>
+              <a:t>وحدتِ فکر و عمل</a:t>
+            </a:r>
+          </a:p>
+        </p:txBody>
+      </p:sp>
+      <p:sp>
+        <p:nvSpPr>
+          <p:cNvPr id="13" name="TextBox 12"/>
+          <p:cNvSpPr txBox="1"/>
+          <p:nvPr/>
+        </p:nvSpPr>
+        <p:spPr>
+          <a:xfrm>
+            <a:off x="822960" y="3758183"/>
+            <a:ext cx="457200" cy="548640"/>
+          </a:xfrm>
+          <a:prstGeom prst="rect">
+            <a:avLst/>
+          </a:prstGeom>
+          <a:noFill/>
+        </p:spPr>
+        <p:txBody>
+          <a:bodyPr wrap="square">
+            <a:spAutoFit/>
+          </a:bodyPr>
+          <a:lstStyle/>
+          <a:p>
+            <a:pPr algn="l">
+              <a:lnSpc>
+                <a:spcPct val="100000"/>
+              </a:lnSpc>
+            </a:pPr>
+            <a:r>
+              <a:rPr sz="2200" b="1" i="0">
+                <a:solidFill>
+                  <a:srgbClr val="C49A45"/>
+                </a:solidFill>
+                <a:latin typeface="Segoe UI"/>
+              </a:rPr>
+              <a:t>3</a:t>
+            </a:r>
+          </a:p>
+        </p:txBody>
+      </p:sp>
+      <p:sp>
+        <p:nvSpPr>
+          <p:cNvPr id="14" name="TextBox 13"/>
+          <p:cNvSpPr txBox="1"/>
+          <p:nvPr/>
+        </p:nvSpPr>
+        <p:spPr>
+          <a:xfrm>
+            <a:off x="1371600" y="3758183"/>
+            <a:ext cx="5669280" cy="548640"/>
+          </a:xfrm>
+          <a:prstGeom prst="rect">
+            <a:avLst/>
+          </a:prstGeom>
+          <a:noFill/>
+        </p:spPr>
+        <p:txBody>
+          <a:bodyPr wrap="square">
+            <a:spAutoFit/>
+          </a:bodyPr>
+          <a:lstStyle/>
+          <a:p>
+            <a:pPr algn="l">
+              <a:lnSpc>
+                <a:spcPct val="100000"/>
+              </a:lnSpc>
+            </a:pPr>
+            <a:r>
+              <a:rPr sz="2500" b="0" i="0">
+                <a:solidFill>
+                  <a:srgbClr val="1C2321"/>
+                </a:solidFill>
+                <a:latin typeface="Georgia"/>
+              </a:rPr>
+              <a:t>Building the means of strength</a:t>
+            </a:r>
+          </a:p>
+        </p:txBody>
+      </p:sp>
+      <p:sp>
+        <p:nvSpPr>
+          <p:cNvPr id="15" name="TextBox 14"/>
+          <p:cNvSpPr txBox="1"/>
+          <p:nvPr/>
+        </p:nvSpPr>
+        <p:spPr>
+          <a:xfrm>
+            <a:off x="7132320" y="3703320"/>
+            <a:ext cx="4297680" cy="640080"/>
+          </a:xfrm>
+          <a:prstGeom prst="rect">
+            <a:avLst/>
+          </a:prstGeom>
+          <a:noFill/>
+        </p:spPr>
+        <p:txBody>
+          <a:bodyPr wrap="square">
+            <a:spAutoFit/>
+          </a:bodyPr>
+          <a:lstStyle/>
+          <a:p>
+            <a:pPr algn="r" rtl="1">
+              <a:lnSpc>
+                <a:spcPct val="180000"/>
+              </a:lnSpc>
+            </a:pPr>
+            <a:r>
+              <a:rPr sz="2200" b="0" i="0">
+                <a:solidFill>
+                  <a:srgbClr val="5A6862"/>
+                </a:solidFill>
+                <a:latin typeface="Noto Nastaliq Urdu"/>
+                <a:cs typeface="Noto Nastaliq Urdu"/>
+              </a:rPr>
+              <a:t>فراہمیِ اسبابِ قوت</a:t>
+            </a:r>
+          </a:p>
+        </p:txBody>
+      </p:sp>
+      <p:sp>
+        <p:nvSpPr>
+          <p:cNvPr id="16" name="TextBox 15"/>
+          <p:cNvSpPr txBox="1"/>
+          <p:nvPr/>
+        </p:nvSpPr>
+        <p:spPr>
+          <a:xfrm>
+            <a:off x="822960" y="4471416"/>
+            <a:ext cx="457200" cy="548640"/>
+          </a:xfrm>
+          <a:prstGeom prst="rect">
+            <a:avLst/>
+          </a:prstGeom>
+          <a:noFill/>
+        </p:spPr>
+        <p:txBody>
+          <a:bodyPr wrap="square">
+            <a:spAutoFit/>
+          </a:bodyPr>
+          <a:lstStyle/>
+          <a:p>
+            <a:pPr algn="l">
+              <a:lnSpc>
+                <a:spcPct val="100000"/>
+              </a:lnSpc>
+            </a:pPr>
+            <a:r>
+              <a:rPr sz="2200" b="1" i="0">
+                <a:solidFill>
+                  <a:srgbClr val="C49A45"/>
+                </a:solidFill>
+                <a:latin typeface="Segoe UI"/>
+              </a:rPr>
+              <a:t>4</a:t>
+            </a:r>
+          </a:p>
+        </p:txBody>
+      </p:sp>
+      <p:sp>
+        <p:nvSpPr>
+          <p:cNvPr id="17" name="TextBox 16"/>
+          <p:cNvSpPr txBox="1"/>
+          <p:nvPr/>
+        </p:nvSpPr>
+        <p:spPr>
+          <a:xfrm>
+            <a:off x="1371600" y="4471416"/>
+            <a:ext cx="5669280" cy="548640"/>
+          </a:xfrm>
+          <a:prstGeom prst="rect">
+            <a:avLst/>
+          </a:prstGeom>
+          <a:noFill/>
+        </p:spPr>
+        <p:txBody>
+          <a:bodyPr wrap="square">
+            <a:spAutoFit/>
+          </a:bodyPr>
+          <a:lstStyle/>
+          <a:p>
+            <a:pPr algn="l">
+              <a:lnSpc>
+                <a:spcPct val="100000"/>
+              </a:lnSpc>
+            </a:pPr>
+            <a:r>
+              <a:rPr sz="2500" b="0" i="0">
+                <a:solidFill>
+                  <a:srgbClr val="1C2321"/>
+                </a:solidFill>
+                <a:latin typeface="Georgia"/>
+              </a:rPr>
+              <a:t>Sustained effort</a:t>
+            </a:r>
+          </a:p>
+        </p:txBody>
+      </p:sp>
+      <p:sp>
+        <p:nvSpPr>
+          <p:cNvPr id="18" name="TextBox 17"/>
+          <p:cNvSpPr txBox="1"/>
+          <p:nvPr/>
+        </p:nvSpPr>
+        <p:spPr>
+          <a:xfrm>
+            <a:off x="7132320" y="4416552"/>
+            <a:ext cx="4297680" cy="640080"/>
+          </a:xfrm>
+          <a:prstGeom prst="rect">
+            <a:avLst/>
+          </a:prstGeom>
+          <a:noFill/>
+        </p:spPr>
+        <p:txBody>
+          <a:bodyPr wrap="square">
+            <a:spAutoFit/>
+          </a:bodyPr>
+          <a:lstStyle/>
+          <a:p>
+            <a:pPr algn="r" rtl="1">
+              <a:lnSpc>
+                <a:spcPct val="180000"/>
+              </a:lnSpc>
+            </a:pPr>
+            <a:r>
+              <a:rPr sz="2200" b="0" i="0">
+                <a:solidFill>
+                  <a:srgbClr val="5A6862"/>
+                </a:solidFill>
+                <a:latin typeface="Noto Nastaliq Urdu"/>
+                <a:cs typeface="Noto Nastaliq Urdu"/>
+              </a:rPr>
+              <a:t>جہدِ مسلسل</a:t>
+            </a:r>
+          </a:p>
+        </p:txBody>
+      </p:sp>
+      <p:sp>
+        <p:nvSpPr>
+          <p:cNvPr id="19" name="TextBox 18"/>
+          <p:cNvSpPr txBox="1"/>
+          <p:nvPr/>
+        </p:nvSpPr>
+        <p:spPr>
+          <a:xfrm>
+            <a:off x="777240" y="5440680"/>
+            <a:ext cx="10607040" cy="365760"/>
+          </a:xfrm>
+          <a:prstGeom prst="rect">
+            <a:avLst/>
+          </a:prstGeom>
+          <a:noFill/>
+        </p:spPr>
+        <p:txBody>
+          <a:bodyPr wrap="square">
+            <a:spAutoFit/>
+          </a:bodyPr>
+          <a:lstStyle/>
+          <a:p>
+            <a:pPr algn="l">
+              <a:lnSpc>
+                <a:spcPct val="100000"/>
+              </a:lnSpc>
+            </a:pPr>
+            <a:r>
+              <a:rPr sz="1300" b="0" i="0">
+                <a:solidFill>
+                  <a:srgbClr val="104A43"/>
+                </a:solidFill>
+                <a:latin typeface="Segoe UI"/>
+              </a:rPr>
+              <a:t>TAREEKH-E-UMMAT, MUQADDIMA, p.53</a:t>
+            </a:r>
+          </a:p>
+        </p:txBody>
+      </p:sp>
+    </p:spTree>
+  </p:cSld>
+  <p:clrMapOvr>
+    <a:masterClrMapping/>
+  </p:clrMapOvr>
+</p:sld>
+</file>
+
+<file path=ppt/slides/slide18.xml><?xml version="1.0" encoding="utf-8"?>
+<p:sld xmlns:a="http://schemas.openxmlformats.org/drawingml/2006/main" xmlns:p="http://schemas.openxmlformats.org/presentationml/2006/main" xmlns:r="http://schemas.openxmlformats.org/officeDocument/2006/relationships">
+  <p:cSld>
+    <p:spTree>
+      <p:nvGrpSpPr>
+        <p:cNvPr id="1" name=""/>
+        <p:cNvGrpSpPr/>
+        <p:nvPr/>
+      </p:nvGrpSpPr>
+      <p:grpSpPr/>
+      <p:sp>
+        <p:nvSpPr>
+          <p:cNvPr id="2" name="Rectangle 1"/>
+          <p:cNvSpPr/>
+          <p:nvPr/>
+        </p:nvSpPr>
+        <p:spPr>
+          <a:xfrm>
+            <a:off x="0" y="0"/>
+            <a:ext cx="12191695" cy="6858000"/>
+          </a:xfrm>
+          <a:prstGeom prst="rect">
+            <a:avLst/>
+          </a:prstGeom>
+          <a:solidFill>
+            <a:srgbClr val="0A322E"/>
+          </a:solidFill>
+          <a:ln>
+            <a:noFill/>
+          </a:ln>
+          <a:effectLst/>
+        </p:spPr>
+        <p:style>
+          <a:lnRef idx="1">
+            <a:schemeClr val="accent1"/>
+          </a:lnRef>
+          <a:fillRef idx="3">
+            <a:schemeClr val="accent1"/>
+          </a:fillRef>
+          <a:effectRef idx="2">
+            <a:schemeClr val="accent1"/>
+          </a:effectRef>
+          <a:fontRef idx="minor">
+            <a:schemeClr val="lt1"/>
+          </a:fontRef>
+        </p:style>
+        <p:txBody>
+          <a:bodyPr rtlCol="0" anchor="ctr"/>
+          <a:lstStyle/>
+          <a:p>
+            <a:pPr algn="ctr"/>
+          </a:p>
+        </p:txBody>
+      </p:sp>
+      <p:sp>
+        <p:nvSpPr>
+          <p:cNvPr id="3" name="TextBox 2"/>
+          <p:cNvSpPr txBox="1"/>
+          <p:nvPr/>
+        </p:nvSpPr>
+        <p:spPr>
+          <a:xfrm>
+            <a:off x="777240" y="420624"/>
+            <a:ext cx="8229600" cy="365760"/>
+          </a:xfrm>
+          <a:prstGeom prst="rect">
+            <a:avLst/>
+          </a:prstGeom>
+          <a:noFill/>
+        </p:spPr>
+        <p:txBody>
+          <a:bodyPr wrap="square">
+            <a:spAutoFit/>
+          </a:bodyPr>
+          <a:lstStyle/>
+          <a:p>
+            <a:pPr algn="l">
+              <a:lnSpc>
+                <a:spcPct val="100000"/>
+              </a:lnSpc>
+            </a:pPr>
+            <a:r>
+              <a:rPr sz="1200" b="1" i="0">
+                <a:solidFill>
+                  <a:srgbClr val="C49A45"/>
+                </a:solidFill>
+                <a:latin typeface="Segoe UI"/>
+              </a:rPr>
+              <a:t>اگلے ہفتے</a:t>
+            </a:r>
+          </a:p>
+        </p:txBody>
+      </p:sp>
+      <p:sp>
+        <p:nvSpPr>
+          <p:cNvPr id="4" name="TextBox 3"/>
+          <p:cNvSpPr txBox="1"/>
+          <p:nvPr/>
+        </p:nvSpPr>
+        <p:spPr>
+          <a:xfrm>
+            <a:off x="822960" y="1965960"/>
+            <a:ext cx="10515600" cy="2011680"/>
+          </a:xfrm>
+          <a:prstGeom prst="rect">
+            <a:avLst/>
+          </a:prstGeom>
+          <a:noFill/>
+        </p:spPr>
+        <p:txBody>
+          <a:bodyPr wrap="square" anchor="ctr">
+            <a:spAutoFit/>
+          </a:bodyPr>
+          <a:lstStyle/>
+          <a:p>
+            <a:pPr algn="l">
+              <a:lnSpc>
+                <a:spcPct val="120000"/>
+              </a:lnSpc>
+            </a:pPr>
+            <a:r>
+              <a:rPr sz="5200" b="0" i="0">
+                <a:solidFill>
+                  <a:srgbClr val="FAF7F0"/>
+                </a:solidFill>
+                <a:latin typeface="Georgia"/>
+              </a:rPr>
+              <a:t>Next week: twelve years.</a:t>
+            </a:r>
+          </a:p>
+        </p:txBody>
+      </p:sp>
+      <p:sp>
+        <p:nvSpPr>
+          <p:cNvPr id="5" name="TextBox 4"/>
+          <p:cNvSpPr txBox="1"/>
+          <p:nvPr/>
+        </p:nvSpPr>
+        <p:spPr>
+          <a:xfrm>
+            <a:off x="822960" y="4160520"/>
+            <a:ext cx="10515600" cy="914400"/>
+          </a:xfrm>
+          <a:prstGeom prst="rect">
+            <a:avLst/>
+          </a:prstGeom>
+          <a:noFill/>
+        </p:spPr>
+        <p:txBody>
+          <a:bodyPr wrap="square">
+            <a:spAutoFit/>
+          </a:bodyPr>
+          <a:lstStyle/>
+          <a:p>
+            <a:pPr algn="l">
+              <a:lnSpc>
+                <a:spcPct val="130000"/>
+              </a:lnSpc>
+            </a:pPr>
+            <a:r>
+              <a:rPr sz="2300" b="0" i="1">
+                <a:solidFill>
+                  <a:srgbClr val="C49A45"/>
+                </a:solidFill>
+                <a:latin typeface="Georgia"/>
+              </a:rPr>
+              <a:t>632 to 644. All of it inside that one narrow bracket.</a:t>
+            </a:r>
+          </a:p>
+        </p:txBody>
+      </p:sp>
+      <p:pic>
+        <p:nvPicPr>
+          <p:cNvPr id="6" name="Picture 5" descr="line_s2.png"/>
+          <p:cNvPicPr>
+            <a:picLocks noChangeAspect="1"/>
+          </p:cNvPicPr>
+          <p:nvPr/>
+        </p:nvPicPr>
+        <p:blipFill>
+          <a:blip r:embed="rId2"/>
+          <a:stretch>
+            <a:fillRect/>
+          </a:stretch>
+        </p:blipFill>
+        <p:spPr>
+          <a:xfrm>
+            <a:off x="548640" y="6053328"/>
+            <a:ext cx="11091672" cy="1170788"/>
+          </a:xfrm>
+          <a:prstGeom prst="rect">
+            <a:avLst/>
+          </a:prstGeom>
+        </p:spPr>
+      </p:pic>
+    </p:spTree>
+  </p:cSld>
+  <p:clrMapOvr>
+    <a:masterClrMapping/>
+  </p:clrMapOvr>
+</p:sld>
+</file>
+
+<file path=ppt/slides/slide19.xml><?xml version="1.0" encoding="utf-8"?>
+<p:sld xmlns:a="http://schemas.openxmlformats.org/drawingml/2006/main" xmlns:p="http://schemas.openxmlformats.org/presentationml/2006/main" xmlns:r="http://schemas.openxmlformats.org/officeDocument/2006/relationships">
+  <p:cSld>
+    <p:spTree>
+      <p:nvGrpSpPr>
+        <p:cNvPr id="1" name=""/>
+        <p:cNvGrpSpPr/>
+        <p:nvPr/>
+      </p:nvGrpSpPr>
+      <p:grpSpPr/>
+      <p:sp>
+        <p:nvSpPr>
+          <p:cNvPr id="2" name="Rectangle 1"/>
+          <p:cNvSpPr/>
+          <p:nvPr/>
+        </p:nvSpPr>
+        <p:spPr>
+          <a:xfrm>
+            <a:off x="0" y="0"/>
+            <a:ext cx="12191695" cy="6858000"/>
+          </a:xfrm>
+          <a:prstGeom prst="rect">
+            <a:avLst/>
+          </a:prstGeom>
+          <a:solidFill>
+            <a:srgbClr val="FAF7F0"/>
+          </a:solidFill>
+          <a:ln>
+            <a:noFill/>
+          </a:ln>
+          <a:effectLst/>
+        </p:spPr>
+        <p:style>
+          <a:lnRef idx="1">
+            <a:schemeClr val="accent1"/>
+          </a:lnRef>
+          <a:fillRef idx="3">
+            <a:schemeClr val="accent1"/>
+          </a:fillRef>
+          <a:effectRef idx="2">
+            <a:schemeClr val="accent1"/>
+          </a:effectRef>
+          <a:fontRef idx="minor">
+            <a:schemeClr val="lt1"/>
+          </a:fontRef>
+        </p:style>
+        <p:txBody>
+          <a:bodyPr rtlCol="0" anchor="ctr"/>
+          <a:lstStyle/>
+          <a:p>
+            <a:pPr algn="ctr"/>
+          </a:p>
+        </p:txBody>
+      </p:sp>
+      <p:sp>
+        <p:nvSpPr>
+          <p:cNvPr id="3" name="TextBox 2"/>
+          <p:cNvSpPr txBox="1"/>
+          <p:nvPr/>
+        </p:nvSpPr>
+        <p:spPr>
+          <a:xfrm>
+            <a:off x="777240" y="420624"/>
+            <a:ext cx="8229600" cy="365760"/>
+          </a:xfrm>
+          <a:prstGeom prst="rect">
+            <a:avLst/>
+          </a:prstGeom>
+          <a:noFill/>
+        </p:spPr>
+        <p:txBody>
+          <a:bodyPr wrap="square">
+            <a:spAutoFit/>
+          </a:bodyPr>
+          <a:lstStyle/>
+          <a:p>
+            <a:pPr algn="l">
+              <a:lnSpc>
+                <a:spcPct val="100000"/>
+              </a:lnSpc>
+            </a:pPr>
+            <a:r>
+              <a:rPr sz="1200" b="1" i="0">
+                <a:solidFill>
+                  <a:srgbClr val="104A43"/>
+                </a:solidFill>
+                <a:latin typeface="Segoe UI"/>
+              </a:rPr>
+              <a:t>SOURCES  ·  SHOW ONLY IF ASKED</a:t>
+            </a:r>
+          </a:p>
+        </p:txBody>
+      </p:sp>
+      <p:sp>
+        <p:nvSpPr>
+          <p:cNvPr id="4" name="TextBox 3"/>
+          <p:cNvSpPr txBox="1"/>
+          <p:nvPr/>
+        </p:nvSpPr>
+        <p:spPr>
+          <a:xfrm>
+            <a:off x="822960" y="1737360"/>
+            <a:ext cx="10515600" cy="2926080"/>
+          </a:xfrm>
+          <a:prstGeom prst="rect">
+            <a:avLst/>
+          </a:prstGeom>
+          <a:noFill/>
+        </p:spPr>
+        <p:txBody>
+          <a:bodyPr wrap="square">
+            <a:spAutoFit/>
+          </a:bodyPr>
+          <a:lstStyle/>
+          <a:p>
+            <a:pPr algn="l">
               <a:lnSpc>
                 <a:spcPct val="160000"/>
               </a:lnSpc>
             </a:pPr>
             <a:r>
-              <a:rPr sz="2400" b="0">
+              <a:rPr sz="2400" b="0" i="0">
                 <a:solidFill>
                   <a:srgbClr val="1C2321"/>
                 </a:solidFill>
                 <a:latin typeface="Georgia"/>
-                <a:cs typeface="Jameel Noori Nastaleeq"/>
               </a:rPr>
-              <a:t>تاریخِ امت — مولانا محمد اسماعیل ریحان</a:t>
-            </a:r>
-          </a:p>
-          <a:p>
-            <a:pPr algn="r" rtl="1">
+              <a:t>Tareekh-e-Ummat</a:t>
+            </a:r>
+          </a:p>
+          <a:p>
+            <a:pPr algn="l">
               <a:lnSpc>
                 <a:spcPct val="160000"/>
               </a:lnSpc>
             </a:pPr>
             <a:r>
-              <a:rPr sz="2400" b="0">
+              <a:rPr sz="2400" b="0" i="0">
                 <a:solidFill>
                   <a:srgbClr val="1C2321"/>
                 </a:solidFill>
                 <a:latin typeface="Georgia"/>
-                <a:cs typeface="Jameel Noori Nastaleeq"/>
               </a:rPr>
-              <a:t>مقدمہ، ص۵۳ · ص۵۷</a:t>
-            </a:r>
-          </a:p>
-          <a:p>
-            <a:pPr algn="r" rtl="1">
+              <a:t>Maulana Muhammad Ismail Rehan  —  muqaddima, pp. 53, 57</a:t>
+            </a:r>
+          </a:p>
+          <a:p>
+            <a:pPr algn="l">
               <a:lnSpc>
                 <a:spcPct val="160000"/>
               </a:lnSpc>
             </a:pPr>
             <a:r>
-              <a:rPr sz="2400" b="0">
+              <a:rPr sz="2400" b="0" i="0">
                 <a:solidFill>
                   <a:srgbClr val="1C2321"/>
                 </a:solidFill>
                 <a:latin typeface="Georgia"/>
-                <a:cs typeface="Jameel Noori Nastaleeq"/>
               </a:rPr>
               <a:t/>
             </a:r>
           </a:p>
           <a:p>
-            <a:pPr algn="r" rtl="1">
+            <a:pPr algn="l">
               <a:lnSpc>
                 <a:spcPct val="160000"/>
               </a:lnSpc>
             </a:pPr>
             <a:r>
-              <a:rPr sz="2400" b="0">
+              <a:rPr sz="2400" b="0" i="0">
                 <a:solidFill>
                   <a:srgbClr val="1C2321"/>
                 </a:solidFill>
                 <a:latin typeface="Georgia"/>
-                <a:cs typeface="Jameel Noori Nastaleeq"/>
               </a:rPr>
-              <a:t>الإعلان بالتوبيخ — علامہ سخاوی رحمہ اللہ، ص۱۱۱</a:t>
+              <a:t>al-I'lan bi'l-Tawbikh</a:t>
+            </a:r>
+          </a:p>
+          <a:p>
+            <a:pPr algn="l">
+              <a:lnSpc>
+                <a:spcPct val="160000"/>
+              </a:lnSpc>
+            </a:pPr>
+            <a:r>
+              <a:rPr sz="2400" b="0" i="0">
+                <a:solidFill>
+                  <a:srgbClr val="1C2321"/>
+                </a:solidFill>
+                <a:latin typeface="Georgia"/>
+              </a:rPr>
+              <a:t>al-Sakhawi  —  p. 111</a:t>
+            </a:r>
+          </a:p>
+        </p:txBody>
+      </p:sp>
+      <p:sp>
+        <p:nvSpPr>
+          <p:cNvPr id="5" name="TextBox 4"/>
+          <p:cNvSpPr txBox="1"/>
+          <p:nvPr/>
+        </p:nvSpPr>
+        <p:spPr>
+          <a:xfrm>
+            <a:off x="822960" y="4937760"/>
+            <a:ext cx="10515600" cy="457200"/>
+          </a:xfrm>
+          <a:prstGeom prst="rect">
+            <a:avLst/>
+          </a:prstGeom>
+          <a:noFill/>
+        </p:spPr>
+        <p:txBody>
+          <a:bodyPr wrap="square">
+            <a:spAutoFit/>
+          </a:bodyPr>
+          <a:lstStyle/>
+          <a:p>
+            <a:pPr algn="l">
+              <a:lnSpc>
+                <a:spcPct val="100000"/>
+              </a:lnSpc>
+            </a:pPr>
+            <a:r>
+              <a:rPr sz="1900" b="0" i="1">
+                <a:solidFill>
+                  <a:srgbClr val="7A2E2E"/>
+                </a:solidFill>
+                <a:latin typeface="Georgia"/>
+              </a:rPr>
+              <a:t>Every claim tonight traces to a printed page you could open yourself.</a:t>
             </a:r>
           </a:p>
         </p:txBody>
@@ -6721,8 +9023,8 @@
         </p:nvSpPr>
         <p:spPr>
           <a:xfrm>
-            <a:off x="822960" y="2743200"/>
-            <a:ext cx="10515600" cy="1280160"/>
+            <a:off x="777240" y="420624"/>
+            <a:ext cx="8229600" cy="365760"/>
           </a:xfrm>
           <a:prstGeom prst="rect">
             <a:avLst/>
@@ -6735,20 +9037,97 @@
           </a:bodyPr>
           <a:lstStyle/>
           <a:p>
-            <a:pPr algn="ctr">
+            <a:pPr algn="l">
               <a:lnSpc>
                 <a:spcPct val="100000"/>
               </a:lnSpc>
             </a:pPr>
             <a:r>
-              <a:rPr sz="7200" b="0">
+              <a:rPr sz="1200" b="1" i="0">
                 <a:solidFill>
                   <a:srgbClr val="C49A45"/>
                 </a:solidFill>
+                <a:latin typeface="Segoe UI"/>
+              </a:rPr>
+              <a:t>ONE NIGHT, IN THE MIDDLE OF OUR STORY</a:t>
+            </a:r>
+          </a:p>
+        </p:txBody>
+      </p:sp>
+      <p:sp>
+        <p:nvSpPr>
+          <p:cNvPr id="4" name="TextBox 3"/>
+          <p:cNvSpPr txBox="1"/>
+          <p:nvPr/>
+        </p:nvSpPr>
+        <p:spPr>
+          <a:xfrm>
+            <a:off x="822960" y="1965960"/>
+            <a:ext cx="10515600" cy="2011680"/>
+          </a:xfrm>
+          <a:prstGeom prst="rect">
+            <a:avLst/>
+          </a:prstGeom>
+          <a:noFill/>
+        </p:spPr>
+        <p:txBody>
+          <a:bodyPr wrap="square" anchor="ctr">
+            <a:spAutoFit/>
+          </a:bodyPr>
+          <a:lstStyle/>
+          <a:p>
+            <a:pPr algn="l">
+              <a:lnSpc>
+                <a:spcPct val="120000"/>
+              </a:lnSpc>
+            </a:pPr>
+            <a:r>
+              <a:rPr sz="5200" b="0" i="0">
+                <a:solidFill>
+                  <a:srgbClr val="C49A45"/>
+                </a:solidFill>
                 <a:latin typeface="Georgia"/>
-                <a:cs typeface="Jameel Noori Nastaleeq"/>
               </a:rPr>
-              <a:t>۶۵۶ھ</a:t>
+              <a:t>656 AH</a:t>
+            </a:r>
+          </a:p>
+        </p:txBody>
+      </p:sp>
+      <p:sp>
+        <p:nvSpPr>
+          <p:cNvPr id="5" name="TextBox 4"/>
+          <p:cNvSpPr txBox="1"/>
+          <p:nvPr/>
+        </p:nvSpPr>
+        <p:spPr>
+          <a:xfrm>
+            <a:off x="822960" y="4160520"/>
+            <a:ext cx="10515600" cy="914400"/>
+          </a:xfrm>
+          <a:prstGeom prst="rect">
+            <a:avLst/>
+          </a:prstGeom>
+          <a:noFill/>
+        </p:spPr>
+        <p:txBody>
+          <a:bodyPr wrap="square">
+            <a:spAutoFit/>
+          </a:bodyPr>
+          <a:lstStyle/>
+          <a:p>
+            <a:pPr algn="l">
+              <a:lnSpc>
+                <a:spcPct val="130000"/>
+              </a:lnSpc>
+            </a:pPr>
+            <a:r>
+              <a:rPr sz="2300" b="0" i="1">
+                <a:solidFill>
+                  <a:srgbClr val="C49A45"/>
+                </a:solidFill>
+                <a:latin typeface="Georgia"/>
+              </a:rPr>
+              <a:t>Baghdad falls. The libraries burn.</a:t>
             </a:r>
           </a:p>
         </p:txBody>
@@ -6823,8 +9202,8 @@
         </p:nvSpPr>
         <p:spPr>
           <a:xfrm>
-            <a:off x="822960" y="457200"/>
-            <a:ext cx="7315200" cy="365760"/>
+            <a:off x="777240" y="420624"/>
+            <a:ext cx="8229600" cy="365760"/>
           </a:xfrm>
           <a:prstGeom prst="rect">
             <a:avLst/>
@@ -6843,14 +9222,13 @@
               </a:lnSpc>
             </a:pPr>
             <a:r>
-              <a:rPr sz="1200" b="1">
+              <a:rPr sz="1200" b="1" i="0">
                 <a:solidFill>
                   <a:srgbClr val="104A43"/>
                 </a:solidFill>
                 <a:latin typeface="Segoe UI"/>
-                <a:cs typeface="Jameel Noori Nastaleeq"/>
               </a:rPr>
-              <a:t>THE LINE  ·  وقت</a:t>
+              <a:t>YOU ARE HERE</a:t>
             </a:r>
           </a:p>
         </p:txBody>
@@ -6863,8 +9241,47 @@
         </p:nvSpPr>
         <p:spPr>
           <a:xfrm>
-            <a:off x="822960" y="2377440"/>
-            <a:ext cx="10515600" cy="1097280"/>
+            <a:off x="822960" y="1965960"/>
+            <a:ext cx="10515600" cy="2011680"/>
+          </a:xfrm>
+          <a:prstGeom prst="rect">
+            <a:avLst/>
+          </a:prstGeom>
+          <a:noFill/>
+        </p:spPr>
+        <p:txBody>
+          <a:bodyPr wrap="square" anchor="ctr">
+            <a:spAutoFit/>
+          </a:bodyPr>
+          <a:lstStyle/>
+          <a:p>
+            <a:pPr algn="l">
+              <a:lnSpc>
+                <a:spcPct val="120000"/>
+              </a:lnSpc>
+            </a:pPr>
+            <a:r>
+              <a:rPr sz="5200" b="0" i="0">
+                <a:solidFill>
+                  <a:srgbClr val="104A43"/>
+                </a:solidFill>
+                <a:latin typeface="Georgia"/>
+              </a:rPr>
+              <a:t>That night sits in the middle.</a:t>
+            </a:r>
+          </a:p>
+        </p:txBody>
+      </p:sp>
+      <p:sp>
+        <p:nvSpPr>
+          <p:cNvPr id="5" name="TextBox 4"/>
+          <p:cNvSpPr txBox="1"/>
+          <p:nvPr/>
+        </p:nvSpPr>
+        <p:spPr>
+          <a:xfrm>
+            <a:off x="822960" y="4160520"/>
+            <a:ext cx="10515600" cy="914400"/>
           </a:xfrm>
           <a:prstGeom prst="rect">
             <a:avLst/>
@@ -6877,64 +9294,47 @@
           </a:bodyPr>
           <a:lstStyle/>
           <a:p>
-            <a:pPr algn="ctr">
+            <a:pPr algn="l">
               <a:lnSpc>
-                <a:spcPct val="100000"/>
+                <a:spcPct val="130000"/>
               </a:lnSpc>
             </a:pPr>
             <a:r>
-              <a:rPr sz="5400" b="0">
-                <a:solidFill>
-                  <a:srgbClr val="104A43"/>
+              <a:rPr sz="2300" b="0" i="1">
+                <a:solidFill>
+                  <a:srgbClr val="5A6862"/>
                 </a:solidFill>
                 <a:latin typeface="Georgia"/>
-                <a:cs typeface="Jameel Noori Nastaleeq"/>
               </a:rPr>
-              <a:t>۱۱ھ ← ۱۹۴۷</a:t>
-            </a:r>
-          </a:p>
-        </p:txBody>
-      </p:sp>
-      <p:sp>
-        <p:nvSpPr>
-          <p:cNvPr id="5" name="TextBox 4"/>
-          <p:cNvSpPr txBox="1"/>
-          <p:nvPr/>
-        </p:nvSpPr>
-        <p:spPr>
-          <a:xfrm>
-            <a:off x="822960" y="3657600"/>
-            <a:ext cx="10515600" cy="640080"/>
-          </a:xfrm>
-          <a:prstGeom prst="rect">
-            <a:avLst/>
-          </a:prstGeom>
-          <a:noFill/>
-        </p:spPr>
-        <p:txBody>
-          <a:bodyPr wrap="square">
-            <a:spAutoFit/>
-          </a:bodyPr>
-          <a:lstStyle/>
-          <a:p>
-            <a:pPr algn="r" rtl="1">
-              <a:lnSpc>
-                <a:spcPct val="100000"/>
-              </a:lnSpc>
-            </a:pPr>
-            <a:r>
-              <a:rPr sz="2400" b="0">
-                <a:solidFill>
-                  <a:srgbClr val="1C2321"/>
-                </a:solidFill>
-                <a:latin typeface="Georgia"/>
-                <a:cs typeface="Jameel Noori Nastaleeq"/>
-              </a:rPr>
-              <a:t>آٹھ نشان  ·  چودہ سو سال  ·  ایک شام</a:t>
-            </a:r>
-          </a:p>
-        </p:txBody>
-      </p:sp>
+              <a:t>Not at the end. So how much came before — and how much after?</a:t>
+            </a:r>
+          </a:p>
+        </p:txBody>
+      </p:sp>
+      <p:pic>
+        <p:nvPicPr>
+          <p:cNvPr id="6" name="Picture 5" descr="line_full.png"/>
+          <p:cNvPicPr>
+            <a:picLocks noChangeAspect="1"/>
+          </p:cNvPicPr>
+          <p:nvPr/>
+        </p:nvPicPr>
+        <p:blipFill>
+          <a:blip r:embed="rId2"/>
+          <a:stretch>
+            <a:fillRect/>
+          </a:stretch>
+        </p:blipFill>
+        <p:spPr>
+          <a:xfrm>
+            <a:off x="548640" y="6053328"/>
+            <a:ext cx="11091672" cy="1170788"/>
+          </a:xfrm>
+          <a:prstGeom prst="rect">
+            <a:avLst/>
+          </a:prstGeom>
+        </p:spPr>
+      </p:pic>
     </p:spTree>
   </p:cSld>
   <p:clrMapOvr>
@@ -6997,46 +9397,30 @@
           </a:p>
         </p:txBody>
       </p:sp>
-      <p:sp>
-        <p:nvSpPr>
-          <p:cNvPr id="3" name="TextBox 2"/>
-          <p:cNvSpPr txBox="1"/>
-          <p:nvPr/>
-        </p:nvSpPr>
-        <p:spPr>
-          <a:xfrm>
-            <a:off x="822960" y="548640"/>
-            <a:ext cx="1097280" cy="914400"/>
-          </a:xfrm>
-          <a:prstGeom prst="rect">
-            <a:avLst/>
-          </a:prstGeom>
-          <a:noFill/>
-        </p:spPr>
-        <p:txBody>
-          <a:bodyPr wrap="square">
-            <a:spAutoFit/>
-          </a:bodyPr>
-          <a:lstStyle/>
-          <a:p>
-            <a:pPr algn="l">
-              <a:lnSpc>
-                <a:spcPct val="100000"/>
-              </a:lnSpc>
-            </a:pPr>
-            <a:r>
-              <a:rPr sz="4000" b="1">
-                <a:solidFill>
-                  <a:srgbClr val="C49A45"/>
-                </a:solidFill>
-                <a:latin typeface="Georgia"/>
-                <a:cs typeface="Jameel Noori Nastaleeq"/>
-              </a:rPr>
-              <a:t>۱</a:t>
-            </a:r>
-          </a:p>
-        </p:txBody>
-      </p:sp>
+      <p:pic>
+        <p:nvPicPr>
+          <p:cNvPr id="3" name="Picture 2" descr="map_s1_sweep.png"/>
+          <p:cNvPicPr>
+            <a:picLocks noChangeAspect="1"/>
+          </p:cNvPicPr>
+          <p:nvPr/>
+        </p:nvPicPr>
+        <p:blipFill>
+          <a:blip r:embed="rId2"/>
+          <a:stretch>
+            <a:fillRect/>
+          </a:stretch>
+        </p:blipFill>
+        <p:spPr>
+          <a:xfrm>
+            <a:off x="0" y="868680"/>
+            <a:ext cx="12191695" cy="6420959"/>
+          </a:xfrm>
+          <a:prstGeom prst="rect">
+            <a:avLst/>
+          </a:prstGeom>
+        </p:spPr>
+      </p:pic>
       <p:sp>
         <p:nvSpPr>
           <p:cNvPr id="4" name="Rectangle 3"/>
@@ -7045,14 +9429,14 @@
         </p:nvSpPr>
         <p:spPr>
           <a:xfrm>
-            <a:off x="822960" y="1554480"/>
-            <a:ext cx="1828800" cy="25400"/>
+            <a:off x="0" y="0"/>
+            <a:ext cx="12191695" cy="868680"/>
           </a:xfrm>
           <a:prstGeom prst="rect">
             <a:avLst/>
           </a:prstGeom>
           <a:solidFill>
-            <a:srgbClr val="C49A45"/>
+            <a:srgbClr val="0A322E"/>
           </a:solidFill>
           <a:ln>
             <a:noFill/>
@@ -7089,8 +9473,8 @@
         </p:nvSpPr>
         <p:spPr>
           <a:xfrm>
-            <a:off x="822960" y="2194560"/>
-            <a:ext cx="10515600" cy="1188720"/>
+            <a:off x="640080" y="146304"/>
+            <a:ext cx="7863840" cy="640080"/>
           </a:xfrm>
           <a:prstGeom prst="rect">
             <a:avLst/>
@@ -7103,20 +9487,19 @@
           </a:bodyPr>
           <a:lstStyle/>
           <a:p>
-            <a:pPr algn="r" rtl="1">
+            <a:pPr algn="l">
               <a:lnSpc>
-                <a:spcPct val="150000"/>
+                <a:spcPct val="100000"/>
               </a:lnSpc>
             </a:pPr>
             <a:r>
-              <a:rPr sz="4800" b="0">
-                <a:solidFill>
-                  <a:srgbClr val="104A43"/>
+              <a:rPr sz="3000" b="0" i="0">
+                <a:solidFill>
+                  <a:srgbClr val="FAF7F0"/>
                 </a:solidFill>
                 <a:latin typeface="Georgia"/>
-                <a:cs typeface="Jameel Noori Nastaleeq"/>
               </a:rPr>
-              <a:t>مدینہ، ۱۱ھ</a:t>
+              <a:t>The whole map, once</a:t>
             </a:r>
           </a:p>
         </p:txBody>
@@ -7129,8 +9512,8 @@
         </p:nvSpPr>
         <p:spPr>
           <a:xfrm>
-            <a:off x="822960" y="3657600"/>
-            <a:ext cx="10515600" cy="822960"/>
+            <a:off x="8595360" y="256032"/>
+            <a:ext cx="3017520" cy="457200"/>
           </a:xfrm>
           <a:prstGeom prst="rect">
             <a:avLst/>
@@ -7143,20 +9526,19 @@
           </a:bodyPr>
           <a:lstStyle/>
           <a:p>
-            <a:pPr algn="r" rtl="1">
+            <a:pPr algn="r">
               <a:lnSpc>
-                <a:spcPct val="150000"/>
+                <a:spcPct val="100000"/>
               </a:lnSpc>
             </a:pPr>
             <a:r>
-              <a:rPr sz="2600" b="0">
-                <a:solidFill>
-                  <a:srgbClr val="1C2321"/>
-                </a:solidFill>
-                <a:latin typeface="Georgia"/>
-                <a:cs typeface="Jameel Noori Nastaleeq"/>
+              <a:rPr sz="1500" b="0" i="0">
+                <a:solidFill>
+                  <a:srgbClr val="C49A45"/>
+                </a:solidFill>
+                <a:latin typeface="Segoe UI"/>
               </a:rPr>
-              <a:t>ایک شہر، ایک نسل</a:t>
+              <a:t>six cities to remember</a:t>
             </a:r>
           </a:p>
         </p:txBody>
@@ -7231,8 +9613,8 @@
         </p:nvSpPr>
         <p:spPr>
           <a:xfrm>
-            <a:off x="822960" y="548640"/>
-            <a:ext cx="1097280" cy="914400"/>
+            <a:off x="777240" y="420624"/>
+            <a:ext cx="8229600" cy="365760"/>
           </a:xfrm>
           <a:prstGeom prst="rect">
             <a:avLst/>
@@ -7251,59 +9633,53 @@
               </a:lnSpc>
             </a:pPr>
             <a:r>
-              <a:rPr sz="4000" b="1">
-                <a:solidFill>
-                  <a:srgbClr val="C49A45"/>
+              <a:rPr sz="1200" b="1" i="0">
+                <a:solidFill>
+                  <a:srgbClr val="104A43"/>
+                </a:solidFill>
+                <a:latin typeface="Segoe UI"/>
+              </a:rPr>
+              <a:t>MOVE 1</a:t>
+            </a:r>
+          </a:p>
+        </p:txBody>
+      </p:sp>
+      <p:sp>
+        <p:nvSpPr>
+          <p:cNvPr id="4" name="TextBox 3"/>
+          <p:cNvSpPr txBox="1"/>
+          <p:nvPr/>
+        </p:nvSpPr>
+        <p:spPr>
+          <a:xfrm>
+            <a:off x="822960" y="1965960"/>
+            <a:ext cx="10515600" cy="2011680"/>
+          </a:xfrm>
+          <a:prstGeom prst="rect">
+            <a:avLst/>
+          </a:prstGeom>
+          <a:noFill/>
+        </p:spPr>
+        <p:txBody>
+          <a:bodyPr wrap="square" anchor="ctr">
+            <a:spAutoFit/>
+          </a:bodyPr>
+          <a:lstStyle/>
+          <a:p>
+            <a:pPr algn="l">
+              <a:lnSpc>
+                <a:spcPct val="120000"/>
+              </a:lnSpc>
+            </a:pPr>
+            <a:r>
+              <a:rPr sz="5200" b="0" i="0">
+                <a:solidFill>
+                  <a:srgbClr val="104A43"/>
                 </a:solidFill>
                 <a:latin typeface="Georgia"/>
-                <a:cs typeface="Jameel Noori Nastaleeq"/>
               </a:rPr>
-              <a:t>۲</a:t>
-            </a:r>
-          </a:p>
-        </p:txBody>
-      </p:sp>
-      <p:sp>
-        <p:nvSpPr>
-          <p:cNvPr id="4" name="Rectangle 3"/>
-          <p:cNvSpPr/>
-          <p:nvPr/>
-        </p:nvSpPr>
-        <p:spPr>
-          <a:xfrm>
-            <a:off x="822960" y="1554480"/>
-            <a:ext cx="1828800" cy="25400"/>
-          </a:xfrm>
-          <a:prstGeom prst="rect">
-            <a:avLst/>
-          </a:prstGeom>
-          <a:solidFill>
-            <a:srgbClr val="C49A45"/>
-          </a:solidFill>
-          <a:ln>
-            <a:noFill/>
-          </a:ln>
-          <a:effectLst/>
-        </p:spPr>
-        <p:style>
-          <a:lnRef idx="1">
-            <a:schemeClr val="accent1"/>
-          </a:lnRef>
-          <a:fillRef idx="3">
-            <a:schemeClr val="accent1"/>
-          </a:fillRef>
-          <a:effectRef idx="2">
-            <a:schemeClr val="accent1"/>
-          </a:effectRef>
-          <a:fontRef idx="minor">
-            <a:schemeClr val="lt1"/>
-          </a:fontRef>
-        </p:style>
-        <p:txBody>
-          <a:bodyPr rtlCol="0" anchor="ctr"/>
-          <a:lstStyle/>
-          <a:p>
-            <a:pPr algn="ctr"/>
+              <a:t>One city. One generation.</a:t>
+            </a:r>
           </a:p>
         </p:txBody>
       </p:sp>
@@ -7315,8 +9691,8 @@
         </p:nvSpPr>
         <p:spPr>
           <a:xfrm>
-            <a:off x="822960" y="2194560"/>
-            <a:ext cx="10515600" cy="1188720"/>
+            <a:off x="822960" y="4160520"/>
+            <a:ext cx="10515600" cy="914400"/>
           </a:xfrm>
           <a:prstGeom prst="rect">
             <a:avLst/>
@@ -7329,64 +9705,47 @@
           </a:bodyPr>
           <a:lstStyle/>
           <a:p>
-            <a:pPr algn="r" rtl="1">
+            <a:pPr algn="l">
               <a:lnSpc>
-                <a:spcPct val="150000"/>
+                <a:spcPct val="130000"/>
               </a:lnSpc>
             </a:pPr>
             <a:r>
-              <a:rPr sz="4800" b="0">
-                <a:solidFill>
-                  <a:srgbClr val="104A43"/>
+              <a:rPr sz="2300" b="0" i="1">
+                <a:solidFill>
+                  <a:srgbClr val="5A6862"/>
                 </a:solidFill>
                 <a:latin typeface="Georgia"/>
-                <a:cs typeface="Jameel Noori Nastaleeq"/>
               </a:rPr>
-              <a:t>اندلس اور سندھ</a:t>
-            </a:r>
-          </a:p>
-        </p:txBody>
-      </p:sp>
-      <p:sp>
-        <p:nvSpPr>
-          <p:cNvPr id="6" name="TextBox 5"/>
-          <p:cNvSpPr txBox="1"/>
-          <p:nvPr/>
-        </p:nvSpPr>
-        <p:spPr>
-          <a:xfrm>
-            <a:off x="822960" y="3657600"/>
-            <a:ext cx="10515600" cy="822960"/>
-          </a:xfrm>
-          <a:prstGeom prst="rect">
-            <a:avLst/>
-          </a:prstGeom>
-          <a:noFill/>
-        </p:spPr>
-        <p:txBody>
-          <a:bodyPr wrap="square">
-            <a:spAutoFit/>
-          </a:bodyPr>
-          <a:lstStyle/>
-          <a:p>
-            <a:pPr algn="r" rtl="1">
-              <a:lnSpc>
-                <a:spcPct val="150000"/>
-              </a:lnSpc>
-            </a:pPr>
-            <a:r>
-              <a:rPr sz="2600" b="0">
-                <a:solidFill>
-                  <a:srgbClr val="1C2321"/>
-                </a:solidFill>
-                <a:latin typeface="Georgia"/>
-                <a:cs typeface="Jameel Noori Nastaleeq"/>
-              </a:rPr>
-              <a:t>ایک ہی دہائی میں — مغرب اور مشرق</a:t>
-            </a:r>
-          </a:p>
-        </p:txBody>
-      </p:sp>
+              <a:t>Madina, 632. Nobody expected what came next.</a:t>
+            </a:r>
+          </a:p>
+        </p:txBody>
+      </p:sp>
+      <p:pic>
+        <p:nvPicPr>
+          <p:cNvPr id="6" name="Picture 5" descr="line_s2.png"/>
+          <p:cNvPicPr>
+            <a:picLocks noChangeAspect="1"/>
+          </p:cNvPicPr>
+          <p:nvPr/>
+        </p:nvPicPr>
+        <p:blipFill>
+          <a:blip r:embed="rId2"/>
+          <a:stretch>
+            <a:fillRect/>
+          </a:stretch>
+        </p:blipFill>
+        <p:spPr>
+          <a:xfrm>
+            <a:off x="548640" y="6053328"/>
+            <a:ext cx="11091672" cy="1170788"/>
+          </a:xfrm>
+          <a:prstGeom prst="rect">
+            <a:avLst/>
+          </a:prstGeom>
+        </p:spPr>
+      </p:pic>
     </p:spTree>
   </p:cSld>
   <p:clrMapOvr>
@@ -7457,8 +9816,8 @@
         </p:nvSpPr>
         <p:spPr>
           <a:xfrm>
-            <a:off x="822960" y="548640"/>
-            <a:ext cx="1097280" cy="914400"/>
+            <a:off x="777240" y="420624"/>
+            <a:ext cx="8229600" cy="365760"/>
           </a:xfrm>
           <a:prstGeom prst="rect">
             <a:avLst/>
@@ -7477,59 +9836,53 @@
               </a:lnSpc>
             </a:pPr>
             <a:r>
-              <a:rPr sz="4000" b="1">
-                <a:solidFill>
-                  <a:srgbClr val="C49A45"/>
+              <a:rPr sz="1200" b="1" i="0">
+                <a:solidFill>
+                  <a:srgbClr val="104A43"/>
+                </a:solidFill>
+                <a:latin typeface="Segoe UI"/>
+              </a:rPr>
+              <a:t>MOVE 2</a:t>
+            </a:r>
+          </a:p>
+        </p:txBody>
+      </p:sp>
+      <p:sp>
+        <p:nvSpPr>
+          <p:cNvPr id="4" name="TextBox 3"/>
+          <p:cNvSpPr txBox="1"/>
+          <p:nvPr/>
+        </p:nvSpPr>
+        <p:spPr>
+          <a:xfrm>
+            <a:off x="822960" y="1965960"/>
+            <a:ext cx="10515600" cy="2011680"/>
+          </a:xfrm>
+          <a:prstGeom prst="rect">
+            <a:avLst/>
+          </a:prstGeom>
+          <a:noFill/>
+        </p:spPr>
+        <p:txBody>
+          <a:bodyPr wrap="square" anchor="ctr">
+            <a:spAutoFit/>
+          </a:bodyPr>
+          <a:lstStyle/>
+          <a:p>
+            <a:pPr algn="l">
+              <a:lnSpc>
+                <a:spcPct val="120000"/>
+              </a:lnSpc>
+            </a:pPr>
+            <a:r>
+              <a:rPr sz="5200" b="0" i="0">
+                <a:solidFill>
+                  <a:srgbClr val="104A43"/>
                 </a:solidFill>
                 <a:latin typeface="Georgia"/>
-                <a:cs typeface="Jameel Noori Nastaleeq"/>
               </a:rPr>
-              <a:t>۳</a:t>
-            </a:r>
-          </a:p>
-        </p:txBody>
-      </p:sp>
-      <p:sp>
-        <p:nvSpPr>
-          <p:cNvPr id="4" name="Rectangle 3"/>
-          <p:cNvSpPr/>
-          <p:nvPr/>
-        </p:nvSpPr>
-        <p:spPr>
-          <a:xfrm>
-            <a:off x="822960" y="1554480"/>
-            <a:ext cx="1828800" cy="25400"/>
-          </a:xfrm>
-          <a:prstGeom prst="rect">
-            <a:avLst/>
-          </a:prstGeom>
-          <a:solidFill>
-            <a:srgbClr val="C49A45"/>
-          </a:solidFill>
-          <a:ln>
-            <a:noFill/>
-          </a:ln>
-          <a:effectLst/>
-        </p:spPr>
-        <p:style>
-          <a:lnRef idx="1">
-            <a:schemeClr val="accent1"/>
-          </a:lnRef>
-          <a:fillRef idx="3">
-            <a:schemeClr val="accent1"/>
-          </a:fillRef>
-          <a:effectRef idx="2">
-            <a:schemeClr val="accent1"/>
-          </a:effectRef>
-          <a:fontRef idx="minor">
-            <a:schemeClr val="lt1"/>
-          </a:fontRef>
-        </p:style>
-        <p:txBody>
-          <a:bodyPr rtlCol="0" anchor="ctr"/>
-          <a:lstStyle/>
-          <a:p>
-            <a:pPr algn="ctr"/>
+              <a:t>Spain and Sindh — the same decade.</a:t>
+            </a:r>
           </a:p>
         </p:txBody>
       </p:sp>
@@ -7541,8 +9894,8 @@
         </p:nvSpPr>
         <p:spPr>
           <a:xfrm>
-            <a:off x="822960" y="2194560"/>
-            <a:ext cx="10515600" cy="1188720"/>
+            <a:off x="822960" y="4160520"/>
+            <a:ext cx="10515600" cy="914400"/>
           </a:xfrm>
           <a:prstGeom prst="rect">
             <a:avLst/>
@@ -7555,64 +9908,47 @@
           </a:bodyPr>
           <a:lstStyle/>
           <a:p>
-            <a:pPr algn="r" rtl="1">
+            <a:pPr algn="l">
               <a:lnSpc>
-                <a:spcPct val="150000"/>
+                <a:spcPct val="130000"/>
               </a:lnSpc>
             </a:pPr>
             <a:r>
-              <a:rPr sz="4800" b="0">
-                <a:solidFill>
-                  <a:srgbClr val="104A43"/>
+              <a:rPr sz="2300" b="0" i="1">
+                <a:solidFill>
+                  <a:srgbClr val="5A6862"/>
                 </a:solidFill>
                 <a:latin typeface="Georgia"/>
-                <a:cs typeface="Jameel Noori Nastaleeq"/>
               </a:rPr>
-              <a:t>بغداد اور قرطبہ</a:t>
-            </a:r>
-          </a:p>
-        </p:txBody>
-      </p:sp>
-      <p:sp>
-        <p:nvSpPr>
-          <p:cNvPr id="6" name="TextBox 5"/>
-          <p:cNvSpPr txBox="1"/>
-          <p:nvPr/>
-        </p:nvSpPr>
-        <p:spPr>
-          <a:xfrm>
-            <a:off x="822960" y="3657600"/>
-            <a:ext cx="10515600" cy="822960"/>
-          </a:xfrm>
-          <a:prstGeom prst="rect">
-            <a:avLst/>
-          </a:prstGeom>
-          <a:noFill/>
-        </p:spPr>
-        <p:txBody>
-          <a:bodyPr wrap="square">
-            <a:spAutoFit/>
-          </a:bodyPr>
-          <a:lstStyle/>
-          <a:p>
-            <a:pPr algn="r" rtl="1">
-              <a:lnSpc>
-                <a:spcPct val="150000"/>
-              </a:lnSpc>
-            </a:pPr>
-            <a:r>
-              <a:rPr sz="2600" b="0">
-                <a:solidFill>
-                  <a:srgbClr val="1C2321"/>
-                </a:solidFill>
-                <a:latin typeface="Georgia"/>
-                <a:cs typeface="Jameel Noori Nastaleeq"/>
-              </a:rPr>
-              <a:t>ایک ہی صدیوں میں دو مرکز</a:t>
-            </a:r>
-          </a:p>
-        </p:txBody>
-      </p:sp>
+              <a:t>West to the Atlantic, east to the Indus, at once.</a:t>
+            </a:r>
+          </a:p>
+        </p:txBody>
+      </p:sp>
+      <p:pic>
+        <p:nvPicPr>
+          <p:cNvPr id="6" name="Picture 5" descr="line_s4.png"/>
+          <p:cNvPicPr>
+            <a:picLocks noChangeAspect="1"/>
+          </p:cNvPicPr>
+          <p:nvPr/>
+        </p:nvPicPr>
+        <p:blipFill>
+          <a:blip r:embed="rId2"/>
+          <a:stretch>
+            <a:fillRect/>
+          </a:stretch>
+        </p:blipFill>
+        <p:spPr>
+          <a:xfrm>
+            <a:off x="548640" y="6053328"/>
+            <a:ext cx="11091672" cy="1170788"/>
+          </a:xfrm>
+          <a:prstGeom prst="rect">
+            <a:avLst/>
+          </a:prstGeom>
+        </p:spPr>
+      </p:pic>
     </p:spTree>
   </p:cSld>
   <p:clrMapOvr>
@@ -7683,8 +10019,8 @@
         </p:nvSpPr>
         <p:spPr>
           <a:xfrm>
-            <a:off x="822960" y="548640"/>
-            <a:ext cx="1097280" cy="914400"/>
+            <a:off x="777240" y="420624"/>
+            <a:ext cx="8229600" cy="365760"/>
           </a:xfrm>
           <a:prstGeom prst="rect">
             <a:avLst/>
@@ -7703,59 +10039,53 @@
               </a:lnSpc>
             </a:pPr>
             <a:r>
-              <a:rPr sz="4000" b="1">
-                <a:solidFill>
-                  <a:srgbClr val="C49A45"/>
+              <a:rPr sz="1200" b="1" i="0">
+                <a:solidFill>
+                  <a:srgbClr val="104A43"/>
+                </a:solidFill>
+                <a:latin typeface="Segoe UI"/>
+              </a:rPr>
+              <a:t>MOVE 3</a:t>
+            </a:r>
+          </a:p>
+        </p:txBody>
+      </p:sp>
+      <p:sp>
+        <p:nvSpPr>
+          <p:cNvPr id="4" name="TextBox 3"/>
+          <p:cNvSpPr txBox="1"/>
+          <p:nvPr/>
+        </p:nvSpPr>
+        <p:spPr>
+          <a:xfrm>
+            <a:off x="822960" y="1965960"/>
+            <a:ext cx="10515600" cy="2011680"/>
+          </a:xfrm>
+          <a:prstGeom prst="rect">
+            <a:avLst/>
+          </a:prstGeom>
+          <a:noFill/>
+        </p:spPr>
+        <p:txBody>
+          <a:bodyPr wrap="square" anchor="ctr">
+            <a:spAutoFit/>
+          </a:bodyPr>
+          <a:lstStyle/>
+          <a:p>
+            <a:pPr algn="l">
+              <a:lnSpc>
+                <a:spcPct val="120000"/>
+              </a:lnSpc>
+            </a:pPr>
+            <a:r>
+              <a:rPr sz="5200" b="0" i="0">
+                <a:solidFill>
+                  <a:srgbClr val="104A43"/>
                 </a:solidFill>
                 <a:latin typeface="Georgia"/>
-                <a:cs typeface="Jameel Noori Nastaleeq"/>
               </a:rPr>
-              <a:t>۴</a:t>
-            </a:r>
-          </a:p>
-        </p:txBody>
-      </p:sp>
-      <p:sp>
-        <p:nvSpPr>
-          <p:cNvPr id="4" name="Rectangle 3"/>
-          <p:cNvSpPr/>
-          <p:nvPr/>
-        </p:nvSpPr>
-        <p:spPr>
-          <a:xfrm>
-            <a:off x="822960" y="1554480"/>
-            <a:ext cx="1828800" cy="25400"/>
-          </a:xfrm>
-          <a:prstGeom prst="rect">
-            <a:avLst/>
-          </a:prstGeom>
-          <a:solidFill>
-            <a:srgbClr val="C49A45"/>
-          </a:solidFill>
-          <a:ln>
-            <a:noFill/>
-          </a:ln>
-          <a:effectLst/>
-        </p:spPr>
-        <p:style>
-          <a:lnRef idx="1">
-            <a:schemeClr val="accent1"/>
-          </a:lnRef>
-          <a:fillRef idx="3">
-            <a:schemeClr val="accent1"/>
-          </a:fillRef>
-          <a:effectRef idx="2">
-            <a:schemeClr val="accent1"/>
-          </a:effectRef>
-          <a:fontRef idx="minor">
-            <a:schemeClr val="lt1"/>
-          </a:fontRef>
-        </p:style>
-        <p:txBody>
-          <a:bodyPr rtlCol="0" anchor="ctr"/>
-          <a:lstStyle/>
-          <a:p>
-            <a:pPr algn="ctr"/>
+              <a:t>Two capitals at once.</a:t>
+            </a:r>
           </a:p>
         </p:txBody>
       </p:sp>
@@ -7767,8 +10097,8 @@
         </p:nvSpPr>
         <p:spPr>
           <a:xfrm>
-            <a:off x="822960" y="2194560"/>
-            <a:ext cx="10515600" cy="1188720"/>
+            <a:off x="822960" y="4160520"/>
+            <a:ext cx="10515600" cy="914400"/>
           </a:xfrm>
           <a:prstGeom prst="rect">
             <a:avLst/>
@@ -7781,64 +10111,47 @@
           </a:bodyPr>
           <a:lstStyle/>
           <a:p>
-            <a:pPr algn="r" rtl="1">
+            <a:pPr algn="l">
               <a:lnSpc>
-                <a:spcPct val="150000"/>
+                <a:spcPct val="130000"/>
               </a:lnSpc>
             </a:pPr>
             <a:r>
-              <a:rPr sz="4800" b="0">
-                <a:solidFill>
-                  <a:srgbClr val="104A43"/>
+              <a:rPr sz="2300" b="0" i="1">
+                <a:solidFill>
+                  <a:srgbClr val="5A6862"/>
                 </a:solidFill>
                 <a:latin typeface="Georgia"/>
-                <a:cs typeface="Jameel Noori Nastaleeq"/>
               </a:rPr>
-              <a:t>ٹوٹ</a:t>
-            </a:r>
-          </a:p>
-        </p:txBody>
-      </p:sp>
-      <p:sp>
-        <p:nvSpPr>
-          <p:cNvPr id="6" name="TextBox 5"/>
-          <p:cNvSpPr txBox="1"/>
-          <p:nvPr/>
-        </p:nvSpPr>
-        <p:spPr>
-          <a:xfrm>
-            <a:off x="822960" y="3657600"/>
-            <a:ext cx="10515600" cy="822960"/>
-          </a:xfrm>
-          <a:prstGeom prst="rect">
-            <a:avLst/>
-          </a:prstGeom>
-          <a:noFill/>
-        </p:spPr>
-        <p:txBody>
-          <a:bodyPr wrap="square">
-            <a:spAutoFit/>
-          </a:bodyPr>
-          <a:lstStyle/>
-          <a:p>
-            <a:pPr algn="r" rtl="1">
-              <a:lnSpc>
-                <a:spcPct val="150000"/>
-              </a:lnSpc>
-            </a:pPr>
-            <a:r>
-              <a:rPr sz="2600" b="0">
-                <a:solidFill>
-                  <a:srgbClr val="1C2321"/>
-                </a:solidFill>
-                <a:latin typeface="Georgia"/>
-                <a:cs typeface="Jameel Noori Nastaleeq"/>
-              </a:rPr>
-              <a:t>بغداد گیا — کتابیں قاہرہ چلی گئیں</a:t>
-            </a:r>
-          </a:p>
-        </p:txBody>
-      </p:sp>
+              <a:t>Baghdad translating the world; Cordoba building a library.</a:t>
+            </a:r>
+          </a:p>
+        </p:txBody>
+      </p:sp>
+      <p:pic>
+        <p:nvPicPr>
+          <p:cNvPr id="6" name="Picture 5" descr="line_s5.png"/>
+          <p:cNvPicPr>
+            <a:picLocks noChangeAspect="1"/>
+          </p:cNvPicPr>
+          <p:nvPr/>
+        </p:nvPicPr>
+        <p:blipFill>
+          <a:blip r:embed="rId2"/>
+          <a:stretch>
+            <a:fillRect/>
+          </a:stretch>
+        </p:blipFill>
+        <p:spPr>
+          <a:xfrm>
+            <a:off x="548640" y="6053328"/>
+            <a:ext cx="11091672" cy="1170788"/>
+          </a:xfrm>
+          <a:prstGeom prst="rect">
+            <a:avLst/>
+          </a:prstGeom>
+        </p:spPr>
+      </p:pic>
     </p:spTree>
   </p:cSld>
   <p:clrMapOvr>
@@ -7872,7 +10185,7 @@
             <a:avLst/>
           </a:prstGeom>
           <a:solidFill>
-            <a:srgbClr val="FAF7F0"/>
+            <a:srgbClr val="0A322E"/>
           </a:solidFill>
           <a:ln>
             <a:noFill/>
@@ -7909,8 +10222,8 @@
         </p:nvSpPr>
         <p:spPr>
           <a:xfrm>
-            <a:off x="822960" y="548640"/>
-            <a:ext cx="1097280" cy="914400"/>
+            <a:off x="777240" y="420624"/>
+            <a:ext cx="8229600" cy="365760"/>
           </a:xfrm>
           <a:prstGeom prst="rect">
             <a:avLst/>
@@ -7929,59 +10242,53 @@
               </a:lnSpc>
             </a:pPr>
             <a:r>
-              <a:rPr sz="4000" b="1">
+              <a:rPr sz="1200" b="1" i="0">
                 <a:solidFill>
                   <a:srgbClr val="C49A45"/>
                 </a:solidFill>
+                <a:latin typeface="Segoe UI"/>
+              </a:rPr>
+              <a:t>MOVE 4</a:t>
+            </a:r>
+          </a:p>
+        </p:txBody>
+      </p:sp>
+      <p:sp>
+        <p:nvSpPr>
+          <p:cNvPr id="4" name="TextBox 3"/>
+          <p:cNvSpPr txBox="1"/>
+          <p:nvPr/>
+        </p:nvSpPr>
+        <p:spPr>
+          <a:xfrm>
+            <a:off x="822960" y="1965960"/>
+            <a:ext cx="10515600" cy="2011680"/>
+          </a:xfrm>
+          <a:prstGeom prst="rect">
+            <a:avLst/>
+          </a:prstGeom>
+          <a:noFill/>
+        </p:spPr>
+        <p:txBody>
+          <a:bodyPr wrap="square" anchor="ctr">
+            <a:spAutoFit/>
+          </a:bodyPr>
+          <a:lstStyle/>
+          <a:p>
+            <a:pPr algn="l">
+              <a:lnSpc>
+                <a:spcPct val="120000"/>
+              </a:lnSpc>
+            </a:pPr>
+            <a:r>
+              <a:rPr sz="5200" b="0" i="0">
+                <a:solidFill>
+                  <a:srgbClr val="C49A45"/>
+                </a:solidFill>
                 <a:latin typeface="Georgia"/>
-                <a:cs typeface="Jameel Noori Nastaleeq"/>
               </a:rPr>
-              <a:t>۵</a:t>
-            </a:r>
-          </a:p>
-        </p:txBody>
-      </p:sp>
-      <p:sp>
-        <p:nvSpPr>
-          <p:cNvPr id="4" name="Rectangle 3"/>
-          <p:cNvSpPr/>
-          <p:nvPr/>
-        </p:nvSpPr>
-        <p:spPr>
-          <a:xfrm>
-            <a:off x="822960" y="1554480"/>
-            <a:ext cx="1828800" cy="25400"/>
-          </a:xfrm>
-          <a:prstGeom prst="rect">
-            <a:avLst/>
-          </a:prstGeom>
-          <a:solidFill>
-            <a:srgbClr val="C49A45"/>
-          </a:solidFill>
-          <a:ln>
-            <a:noFill/>
-          </a:ln>
-          <a:effectLst/>
-        </p:spPr>
-        <p:style>
-          <a:lnRef idx="1">
-            <a:schemeClr val="accent1"/>
-          </a:lnRef>
-          <a:fillRef idx="3">
-            <a:schemeClr val="accent1"/>
-          </a:fillRef>
-          <a:effectRef idx="2">
-            <a:schemeClr val="accent1"/>
-          </a:effectRef>
-          <a:fontRef idx="minor">
-            <a:schemeClr val="lt1"/>
-          </a:fontRef>
-        </p:style>
-        <p:txBody>
-          <a:bodyPr rtlCol="0" anchor="ctr"/>
-          <a:lstStyle/>
-          <a:p>
-            <a:pPr algn="ctr"/>
+              <a:t>The capital falls — and it does not end.</a:t>
+            </a:r>
           </a:p>
         </p:txBody>
       </p:sp>
@@ -7993,8 +10300,8 @@
         </p:nvSpPr>
         <p:spPr>
           <a:xfrm>
-            <a:off x="822960" y="2194560"/>
-            <a:ext cx="10515600" cy="1188720"/>
+            <a:off x="822960" y="4160520"/>
+            <a:ext cx="10515600" cy="914400"/>
           </a:xfrm>
           <a:prstGeom prst="rect">
             <a:avLst/>
@@ -8007,64 +10314,47 @@
           </a:bodyPr>
           <a:lstStyle/>
           <a:p>
-            <a:pPr algn="r" rtl="1">
+            <a:pPr algn="l">
               <a:lnSpc>
-                <a:spcPct val="150000"/>
+                <a:spcPct val="130000"/>
               </a:lnSpc>
             </a:pPr>
             <a:r>
-              <a:rPr sz="4800" b="0">
-                <a:solidFill>
-                  <a:srgbClr val="104A43"/>
+              <a:rPr sz="2300" b="0" i="1">
+                <a:solidFill>
+                  <a:srgbClr val="C49A45"/>
                 </a:solidFill>
                 <a:latin typeface="Georgia"/>
-                <a:cs typeface="Jameel Noori Nastaleeq"/>
               </a:rPr>
-              <a:t>قسطنطنیہ، ۸۵۷ھ</a:t>
-            </a:r>
-          </a:p>
-        </p:txBody>
-      </p:sp>
-      <p:sp>
-        <p:nvSpPr>
-          <p:cNvPr id="6" name="TextBox 5"/>
-          <p:cNvSpPr txBox="1"/>
-          <p:nvPr/>
-        </p:nvSpPr>
-        <p:spPr>
-          <a:xfrm>
-            <a:off x="822960" y="3657600"/>
-            <a:ext cx="10515600" cy="822960"/>
-          </a:xfrm>
-          <a:prstGeom prst="rect">
-            <a:avLst/>
-          </a:prstGeom>
-          <a:noFill/>
-        </p:spPr>
-        <p:txBody>
-          <a:bodyPr wrap="square">
-            <a:spAutoFit/>
-          </a:bodyPr>
-          <a:lstStyle/>
-          <a:p>
-            <a:pPr algn="r" rtl="1">
-              <a:lnSpc>
-                <a:spcPct val="150000"/>
-              </a:lnSpc>
-            </a:pPr>
-            <a:r>
-              <a:rPr sz="2600" b="0">
-                <a:solidFill>
-                  <a:srgbClr val="1C2321"/>
-                </a:solidFill>
-                <a:latin typeface="Georgia"/>
-                <a:cs typeface="Jameel Noori Nastaleeq"/>
-              </a:rPr>
-              <a:t>اور مشرق میں سندھ سے دہلی تک</a:t>
-            </a:r>
-          </a:p>
-        </p:txBody>
-      </p:sp>
+              <a:t>The books and the scholars had already moved to Cairo.</a:t>
+            </a:r>
+          </a:p>
+        </p:txBody>
+      </p:sp>
+      <p:pic>
+        <p:nvPicPr>
+          <p:cNvPr id="6" name="Picture 5" descr="line_s6.png"/>
+          <p:cNvPicPr>
+            <a:picLocks noChangeAspect="1"/>
+          </p:cNvPicPr>
+          <p:nvPr/>
+        </p:nvPicPr>
+        <p:blipFill>
+          <a:blip r:embed="rId2"/>
+          <a:stretch>
+            <a:fillRect/>
+          </a:stretch>
+        </p:blipFill>
+        <p:spPr>
+          <a:xfrm>
+            <a:off x="548640" y="6053328"/>
+            <a:ext cx="11091672" cy="1170788"/>
+          </a:xfrm>
+          <a:prstGeom prst="rect">
+            <a:avLst/>
+          </a:prstGeom>
+        </p:spPr>
+      </p:pic>
     </p:spTree>
   </p:cSld>
   <p:clrMapOvr>
@@ -8135,8 +10425,8 @@
         </p:nvSpPr>
         <p:spPr>
           <a:xfrm>
-            <a:off x="822960" y="548640"/>
-            <a:ext cx="1097280" cy="914400"/>
+            <a:off x="777240" y="420624"/>
+            <a:ext cx="8229600" cy="365760"/>
           </a:xfrm>
           <a:prstGeom prst="rect">
             <a:avLst/>
@@ -8155,59 +10445,53 @@
               </a:lnSpc>
             </a:pPr>
             <a:r>
-              <a:rPr sz="4000" b="1">
-                <a:solidFill>
-                  <a:srgbClr val="C49A45"/>
+              <a:rPr sz="1200" b="1" i="0">
+                <a:solidFill>
+                  <a:srgbClr val="104A43"/>
+                </a:solidFill>
+                <a:latin typeface="Segoe UI"/>
+              </a:rPr>
+              <a:t>MOVE 5</a:t>
+            </a:r>
+          </a:p>
+        </p:txBody>
+      </p:sp>
+      <p:sp>
+        <p:nvSpPr>
+          <p:cNvPr id="4" name="TextBox 3"/>
+          <p:cNvSpPr txBox="1"/>
+          <p:nvPr/>
+        </p:nvSpPr>
+        <p:spPr>
+          <a:xfrm>
+            <a:off x="822960" y="1965960"/>
+            <a:ext cx="10515600" cy="2011680"/>
+          </a:xfrm>
+          <a:prstGeom prst="rect">
+            <a:avLst/>
+          </a:prstGeom>
+          <a:noFill/>
+        </p:spPr>
+        <p:txBody>
+          <a:bodyPr wrap="square" anchor="ctr">
+            <a:spAutoFit/>
+          </a:bodyPr>
+          <a:lstStyle/>
+          <a:p>
+            <a:pPr algn="l">
+              <a:lnSpc>
+                <a:spcPct val="120000"/>
+              </a:lnSpc>
+            </a:pPr>
+            <a:r>
+              <a:rPr sz="5200" b="0" i="0">
+                <a:solidFill>
+                  <a:srgbClr val="104A43"/>
                 </a:solidFill>
                 <a:latin typeface="Georgia"/>
-                <a:cs typeface="Jameel Noori Nastaleeq"/>
               </a:rPr>
-              <a:t>۶</a:t>
-            </a:r>
-          </a:p>
-        </p:txBody>
-      </p:sp>
-      <p:sp>
-        <p:nvSpPr>
-          <p:cNvPr id="4" name="Rectangle 3"/>
-          <p:cNvSpPr/>
-          <p:nvPr/>
-        </p:nvSpPr>
-        <p:spPr>
-          <a:xfrm>
-            <a:off x="822960" y="1554480"/>
-            <a:ext cx="1828800" cy="25400"/>
-          </a:xfrm>
-          <a:prstGeom prst="rect">
-            <a:avLst/>
-          </a:prstGeom>
-          <a:solidFill>
-            <a:srgbClr val="C49A45"/>
-          </a:solidFill>
-          <a:ln>
-            <a:noFill/>
-          </a:ln>
-          <a:effectLst/>
-        </p:spPr>
-        <p:style>
-          <a:lnRef idx="1">
-            <a:schemeClr val="accent1"/>
-          </a:lnRef>
-          <a:fillRef idx="3">
-            <a:schemeClr val="accent1"/>
-          </a:fillRef>
-          <a:effectRef idx="2">
-            <a:schemeClr val="accent1"/>
-          </a:effectRef>
-          <a:fontRef idx="minor">
-            <a:schemeClr val="lt1"/>
-          </a:fontRef>
-        </p:style>
-        <p:txBody>
-          <a:bodyPr rtlCol="0" anchor="ctr"/>
-          <a:lstStyle/>
-          <a:p>
-            <a:pPr algn="ctr"/>
+              <a:t>1453 — a door opens.</a:t>
+            </a:r>
           </a:p>
         </p:txBody>
       </p:sp>
@@ -8219,8 +10503,8 @@
         </p:nvSpPr>
         <p:spPr>
           <a:xfrm>
-            <a:off x="822960" y="2194560"/>
-            <a:ext cx="10515600" cy="1188720"/>
+            <a:off x="822960" y="4160520"/>
+            <a:ext cx="10515600" cy="914400"/>
           </a:xfrm>
           <a:prstGeom prst="rect">
             <a:avLst/>
@@ -8233,64 +10517,47 @@
           </a:bodyPr>
           <a:lstStyle/>
           <a:p>
-            <a:pPr algn="r" rtl="1">
+            <a:pPr algn="l">
               <a:lnSpc>
-                <a:spcPct val="150000"/>
+                <a:spcPct val="130000"/>
               </a:lnSpc>
             </a:pPr>
             <a:r>
-              <a:rPr sz="4800" b="0">
-                <a:solidFill>
-                  <a:srgbClr val="104A43"/>
+              <a:rPr sz="2300" b="0" i="1">
+                <a:solidFill>
+                  <a:srgbClr val="5A6862"/>
                 </a:solidFill>
                 <a:latin typeface="Georgia"/>
-                <a:cs typeface="Jameel Noori Nastaleeq"/>
               </a:rPr>
-              <a:t>۱۹۲۴ … ۱۹۴۷</a:t>
-            </a:r>
-          </a:p>
-        </p:txBody>
-      </p:sp>
-      <p:sp>
-        <p:nvSpPr>
-          <p:cNvPr id="6" name="TextBox 5"/>
-          <p:cNvSpPr txBox="1"/>
-          <p:nvPr/>
-        </p:nvSpPr>
-        <p:spPr>
-          <a:xfrm>
-            <a:off x="822960" y="3657600"/>
-            <a:ext cx="10515600" cy="822960"/>
-          </a:xfrm>
-          <a:prstGeom prst="rect">
-            <a:avLst/>
-          </a:prstGeom>
-          <a:noFill/>
-        </p:spPr>
-        <p:txBody>
-          <a:bodyPr wrap="square">
-            <a:spAutoFit/>
-          </a:bodyPr>
-          <a:lstStyle/>
-          <a:p>
-            <a:pPr algn="r" rtl="1">
-              <a:lnSpc>
-                <a:spcPct val="150000"/>
-              </a:lnSpc>
-            </a:pPr>
-            <a:r>
-              <a:rPr sz="2600" b="0">
-                <a:solidFill>
-                  <a:srgbClr val="1C2321"/>
-                </a:solidFill>
-                <a:latin typeface="Georgia"/>
-                <a:cs typeface="Jameel Noori Nastaleeq"/>
-              </a:rPr>
-              <a:t>زوال، اور پھر — یہاں</a:t>
-            </a:r>
-          </a:p>
-        </p:txBody>
-      </p:sp>
+              <a:t>Constantinople. And in the east, Sindh leads on to Delhi.</a:t>
+            </a:r>
+          </a:p>
+        </p:txBody>
+      </p:sp>
+      <p:pic>
+        <p:nvPicPr>
+          <p:cNvPr id="6" name="Picture 5" descr="line_s7.png"/>
+          <p:cNvPicPr>
+            <a:picLocks noChangeAspect="1"/>
+          </p:cNvPicPr>
+          <p:nvPr/>
+        </p:nvPicPr>
+        <p:blipFill>
+          <a:blip r:embed="rId2"/>
+          <a:stretch>
+            <a:fillRect/>
+          </a:stretch>
+        </p:blipFill>
+        <p:spPr>
+          <a:xfrm>
+            <a:off x="548640" y="6053328"/>
+            <a:ext cx="11091672" cy="1170788"/>
+          </a:xfrm>
+          <a:prstGeom prst="rect">
+            <a:avLst/>
+          </a:prstGeom>
+        </p:spPr>
+      </p:pic>
     </p:spTree>
   </p:cSld>
   <p:clrMapOvr>

--- a/L01_overview/L01.pptx
+++ b/L01_overview/L01.pptx
@@ -9413,8 +9413,8 @@
         </p:blipFill>
         <p:spPr>
           <a:xfrm>
-            <a:off x="0" y="868680"/>
-            <a:ext cx="12191695" cy="6420959"/>
+            <a:off x="513956" y="868680"/>
+            <a:ext cx="11163782" cy="5879592"/>
           </a:xfrm>
           <a:prstGeom prst="rect">
             <a:avLst/>
